--- a/lecons/F5/17_F5_M1_L15_Telecommunication_Internet_Communication.pptx
+++ b/lecons/F5/17_F5_M1_L15_Telecommunication_Internet_Communication.pptx
@@ -13421,7 +13421,7 @@
               <a:buNone/>
             </a:pPr>
             <a:r>
-              <a:rPr lang="en-US" sz="4000" b="1" dirty="0">
+              <a:rPr lang="en-US" sz="3200" b="1" dirty="0">
                 <a:solidFill>
                   <a:srgbClr val="111111"/>
                 </a:solidFill>
@@ -13431,7 +13431,7 @@
               </a:rPr>
               <a:t>Topic: Managing Resources for Development through Economic Activities</a:t>
             </a:r>
-            <a:endParaRPr lang="en-US" sz="4000" dirty="0"/>
+            <a:endParaRPr lang="en-US" sz="3200" dirty="0"/>
           </a:p>
           <a:p>
             <a:pPr algn="l" indent="0" marL="0">
@@ -13441,7 +13441,7 @@
               <a:buNone/>
             </a:pPr>
             <a:r>
-              <a:rPr lang="en-US" sz="4000" b="1" dirty="0">
+              <a:rPr lang="en-US" sz="3200" b="1" dirty="0">
                 <a:solidFill>
                   <a:srgbClr val="111111"/>
                 </a:solidFill>
@@ -13451,7 +13451,7 @@
               </a:rPr>
               <a:t>Sub-topic: World Communication</a:t>
             </a:r>
-            <a:endParaRPr lang="en-US" sz="4000" dirty="0"/>
+            <a:endParaRPr lang="en-US" sz="3200" dirty="0"/>
           </a:p>
           <a:p>
             <a:pPr algn="l" indent="0" marL="0">
@@ -13461,7 +13461,7 @@
               <a:buNone/>
             </a:pPr>
             <a:r>
-              <a:rPr lang="en-US" sz="4000" b="1" dirty="0">
+              <a:rPr lang="en-US" sz="3200" b="1" dirty="0">
                 <a:solidFill>
                   <a:srgbClr val="990011"/>
                 </a:solidFill>
@@ -13471,7 +13471,7 @@
               </a:rPr>
               <a:t>Lesson 15: Telecommunication (Internet Communication)</a:t>
             </a:r>
-            <a:endParaRPr lang="en-US" sz="4000" dirty="0"/>
+            <a:endParaRPr lang="en-US" sz="3200" dirty="0"/>
           </a:p>
         </p:txBody>
       </p:sp>

--- a/lecons/F5/17_F5_M1_L15_Telecommunication_Internet_Communication.pptx
+++ b/lecons/F5/17_F5_M1_L15_Telecommunication_Internet_Communication.pptx
@@ -58,9 +58,11 @@
     <p:sldId id="306" r:id="rId52"/>
     <p:sldId id="307" r:id="rId53"/>
     <p:sldId id="308" r:id="rId54"/>
+    <p:sldId id="309" r:id="rId55"/>
+    <p:sldId id="310" r:id="rId56"/>
   </p:sldIdLst>
   <p:notesMasterIdLst>
-    <p:notesMasterId r:id="rId55"/>
+    <p:notesMasterId r:id="rId57"/>
   </p:notesMasterIdLst>
   <p:sldSz cx="12192000" cy="6858000"/>
   <p:notesSz cx="6858000" cy="12192000"/>
@@ -3370,7 +3372,7 @@
           <a:p>
             <a:r>
               <a:rPr lang="en-US" dirty="0"/>
-              <a:t>Let us copy Advantages, Disadvantages and Socio-economic Impacts. Telecommunication has the following effects. On this slide we have Advantages and Disadvantages. Write each point on a new line, with the key term first, and explain it in your own words when we revise. When you finish, we go to the next slide.</a:t>
+              <a:t>Let us copy Advantages. Telecommunication has the following advantages. On this slide we have Speed and Shorter distances. Write each point on a new line, with the key term first, and explain it in your own words when we revise. When you finish, we go to the next slide.</a:t>
             </a:r>
             <a:endParaRPr lang="en-US" dirty="0"/>
           </a:p>
@@ -3546,7 +3548,7 @@
           <a:p>
             <a:r>
               <a:rPr lang="en-US" dirty="0"/>
-              <a:t>We continue with Advantages, Disadvantages and Socio-economic Impacts. On this slide we have Socio-economic impacts. Write each point on a new line, with the key term first, and explain it in your own words when we revise.</a:t>
+              <a:t>We continue with Advantages. On this slide we have Jobs and business. Write each point on a new line, with the key term first, and explain it in your own words when we revise.</a:t>
             </a:r>
             <a:endParaRPr lang="en-US" dirty="0"/>
           </a:p>
@@ -3634,7 +3636,7 @@
           <a:p>
             <a:r>
               <a:rPr lang="en-US" dirty="0"/>
-              <a:t>Now let us check what you have understood. Question 1: Name two telecommunication networks. Answer in your exercise book.</a:t>
+              <a:t>Let us copy Disadvantages. Telecommunication has the following disadvantages. On this slide we have Cybercrime and Viruses. Write each point on a new line, with the key term first, and explain it in your own words when we revise. When you finish, we go to the next slide.</a:t>
             </a:r>
             <a:endParaRPr lang="en-US" dirty="0"/>
           </a:p>
@@ -3722,7 +3724,7 @@
           <a:p>
             <a:r>
               <a:rPr lang="en-US" dirty="0"/>
-              <a:t>The expected answer is: mobile networks and the internet. If you got it right, well done.</a:t>
+              <a:t>We continue with Disadvantages. On this slide we have False news and Addiction. Write each point on a new line, with the key term first, and explain it in your own words when we revise.</a:t>
             </a:r>
             <a:endParaRPr lang="en-US" dirty="0"/>
           </a:p>
@@ -3810,7 +3812,7 @@
           <a:p>
             <a:r>
               <a:rPr lang="en-US" dirty="0"/>
-              <a:t>Now let us check what you have understood. Question 2: Give one advantage and one disadvantage of the internet. Answer in your exercise book.</a:t>
+              <a:t>Now let us check what you have understood. Question 1: Name two telecommunication networks. Answer in your exercise book.</a:t>
             </a:r>
             <a:endParaRPr lang="en-US" dirty="0"/>
           </a:p>
@@ -3898,7 +3900,7 @@
           <a:p>
             <a:r>
               <a:rPr lang="en-US" dirty="0"/>
-              <a:t>The expected answer is: fast communication; cybercrime. If you got it right, well done.</a:t>
+              <a:t>The expected answer is: mobile networks and the internet. If you got it right, well done.</a:t>
             </a:r>
             <a:endParaRPr lang="en-US" dirty="0"/>
           </a:p>
@@ -3986,7 +3988,7 @@
           <a:p>
             <a:r>
               <a:rPr lang="en-US" dirty="0"/>
-              <a:t>For those who need more practice, fill in the blanks in your exercise book. The answers are: number 1, fibre; number 2, money; number 3, cybercrime.</a:t>
+              <a:t>Now let us check what you have understood. Question 2: Give one advantage and one disadvantage of the internet. Answer in your exercise book.</a:t>
             </a:r>
             <a:endParaRPr lang="en-US" dirty="0"/>
           </a:p>
@@ -4074,7 +4076,7 @@
           <a:p>
             <a:r>
               <a:rPr lang="en-US" dirty="0"/>
-              <a:t>For your homework: Give three ways telecommunication helps farmers and traders in your area. We shall correct it at the beginning of our next lesson.</a:t>
+              <a:t>The expected answer is: fast communication; cybercrime. If you got it right, well done.</a:t>
             </a:r>
             <a:endParaRPr lang="en-US" dirty="0"/>
           </a:p>
@@ -4162,7 +4164,7 @@
           <a:p>
             <a:r>
               <a:rPr lang="en-US" dirty="0"/>
-              <a:t>Our next lesson will be on Lesson 16: Transport Development in Cameroon. Thank you for your attention, and see you next time.</a:t>
+              <a:t>For those who need more practice, fill in the blanks in your exercise book. The answers are: number 1, fibre; number 2, money; number 3, cybercrime.</a:t>
             </a:r>
             <a:endParaRPr lang="en-US" dirty="0"/>
           </a:p>
@@ -4250,7 +4252,7 @@
           <a:p>
             <a:r>
               <a:rPr lang="en-US" dirty="0"/>
-              <a:t>Let us play the bilingual game. I say a word in English, and you give me the French word. Then we do the reverse.</a:t>
+              <a:t>For your homework: Give three ways telecommunication helps farmers and traders in your area. We shall correct it at the beginning of our next lesson.</a:t>
             </a:r>
             <a:endParaRPr lang="en-US" dirty="0"/>
           </a:p>
@@ -4338,7 +4340,7 @@
           <a:p>
             <a:r>
               <a:rPr lang="en-US" dirty="0"/>
-              <a:t>I record this information in the official logbook of the class after the lesson.</a:t>
+              <a:t>Our next lesson will be on Lesson 16: Transport Development in Cameroon. Thank you for your attention, and see you next time.</a:t>
             </a:r>
             <a:endParaRPr lang="en-US" dirty="0"/>
           </a:p>
@@ -4514,7 +4516,7 @@
           <a:p>
             <a:r>
               <a:rPr lang="en-US" dirty="0"/>
-              <a:t>I complete the second page of the logbook: the matter taught, the evaluation, the homework and the attendance.</a:t>
+              <a:t>Let us play the bilingual game. I say a word in English, and you give me the French word. Then we do the reverse.</a:t>
             </a:r>
             <a:endParaRPr lang="en-US" dirty="0"/>
           </a:p>
@@ -4602,7 +4604,7 @@
           <a:p>
             <a:r>
               <a:rPr lang="en-US" dirty="0"/>
-              <a:t>This slide is for me, the teacher: it gives the timing of the lesson and what to do if the projector is not available.</a:t>
+              <a:t>I record this information in the official logbook of the class after the lesson.</a:t>
             </a:r>
             <a:endParaRPr lang="en-US" dirty="0"/>
           </a:p>
@@ -4690,7 +4692,7 @@
           <a:p>
             <a:r>
               <a:rPr lang="en-US" dirty="0"/>
-              <a:t>Take your time to copy this part; we will continue together.</a:t>
+              <a:t>I complete the second page of the logbook: the matter taught, the evaluation, the homework and the attendance.</a:t>
             </a:r>
             <a:endParaRPr lang="en-US" dirty="0"/>
           </a:p>
@@ -4778,7 +4780,7 @@
           <a:p>
             <a:r>
               <a:rPr lang="en-US" dirty="0"/>
-              <a:t>These are the references and picture credits used to prepare this lesson.</a:t>
+              <a:t>This slide is for me, the teacher: it gives the timing of the lesson and what to do if the projector is not available.</a:t>
             </a:r>
             <a:endParaRPr lang="en-US" dirty="0"/>
           </a:p>
@@ -4802,6 +4804,182 @@
             <a:fld id="{F7021451-1387-4CA6-816F-3879F97B5CBC}" type="slidenum">
               <a:rPr lang="en-US"/>
               <a:t>53</a:t>
+            </a:fld>
+            <a:endParaRPr lang="en-US"/>
+          </a:p>
+        </p:txBody>
+      </p:sp>
+    </p:spTree>
+    <p:extLst>
+      <p:ext uri="{BB962C8B-B14F-4D97-AF65-F5344CB8AC3E}">
+        <p14:creationId xmlns:p14="http://schemas.microsoft.com/office/powerpoint/2010/main" val="1024086991"/>
+      </p:ext>
+    </p:extLst>
+  </p:cSld>
+  <p:clrMapOvr>
+    <a:masterClrMapping/>
+  </p:clrMapOvr>
+</p:notes>
+</file>
+
+<file path=ppt/notesSlides/notesSlide54.xml><?xml version="1.0" encoding="utf-8"?>
+<p:notes xmlns:a="http://schemas.openxmlformats.org/drawingml/2006/main" xmlns:r="http://schemas.openxmlformats.org/officeDocument/2006/relationships" xmlns:p="http://schemas.openxmlformats.org/presentationml/2006/main">
+  <p:cSld>
+    <p:spTree>
+      <p:nvGrpSpPr>
+        <p:cNvPr id="1" name=""/>
+        <p:cNvGrpSpPr/>
+        <p:nvPr/>
+      </p:nvGrpSpPr>
+      <p:grpSpPr>
+        <a:xfrm>
+          <a:off x="0" y="0"/>
+          <a:ext cx="0" cy="0"/>
+          <a:chOff x="0" y="0"/>
+          <a:chExt cx="0" cy="0"/>
+        </a:xfrm>
+      </p:grpSpPr>
+      <p:sp>
+        <p:nvSpPr>
+          <p:cNvPr id="2" name="Slide Image Placeholder 1"/>
+          <p:cNvSpPr>
+            <a:spLocks noGrp="1" noRot="1" noChangeAspect="1"/>
+          </p:cNvSpPr>
+          <p:nvPr>
+            <p:ph type="sldImg"/>
+          </p:nvPr>
+        </p:nvSpPr>
+        <p:spPr/>
+      </p:sp>
+      <p:sp>
+        <p:nvSpPr>
+          <p:cNvPr id="3" name="Notes Placeholder 2"/>
+          <p:cNvSpPr>
+            <a:spLocks noGrp="1"/>
+          </p:cNvSpPr>
+          <p:nvPr>
+            <p:ph type="body" idx="1"/>
+          </p:nvPr>
+        </p:nvSpPr>
+        <p:spPr/>
+        <p:txBody>
+          <a:bodyPr/>
+          <a:lstStyle/>
+          <a:p>
+            <a:r>
+              <a:rPr lang="en-US" dirty="0"/>
+              <a:t>Take your time to copy this part; we will continue together.</a:t>
+            </a:r>
+            <a:endParaRPr lang="en-US" dirty="0"/>
+          </a:p>
+        </p:txBody>
+      </p:sp>
+      <p:sp>
+        <p:nvSpPr>
+          <p:cNvPr id="4" name="Slide Number Placeholder 3"/>
+          <p:cNvSpPr>
+            <a:spLocks noGrp="1"/>
+          </p:cNvSpPr>
+          <p:nvPr>
+            <p:ph type="sldNum" sz="quarter" idx="10"/>
+          </p:nvPr>
+        </p:nvSpPr>
+        <p:spPr/>
+        <p:txBody>
+          <a:bodyPr/>
+          <a:lstStyle/>
+          <a:p>
+            <a:fld id="{F7021451-1387-4CA6-816F-3879F97B5CBC}" type="slidenum">
+              <a:rPr lang="en-US"/>
+              <a:t>54</a:t>
+            </a:fld>
+            <a:endParaRPr lang="en-US"/>
+          </a:p>
+        </p:txBody>
+      </p:sp>
+    </p:spTree>
+    <p:extLst>
+      <p:ext uri="{BB962C8B-B14F-4D97-AF65-F5344CB8AC3E}">
+        <p14:creationId xmlns:p14="http://schemas.microsoft.com/office/powerpoint/2010/main" val="1024086991"/>
+      </p:ext>
+    </p:extLst>
+  </p:cSld>
+  <p:clrMapOvr>
+    <a:masterClrMapping/>
+  </p:clrMapOvr>
+</p:notes>
+</file>
+
+<file path=ppt/notesSlides/notesSlide55.xml><?xml version="1.0" encoding="utf-8"?>
+<p:notes xmlns:a="http://schemas.openxmlformats.org/drawingml/2006/main" xmlns:r="http://schemas.openxmlformats.org/officeDocument/2006/relationships" xmlns:p="http://schemas.openxmlformats.org/presentationml/2006/main">
+  <p:cSld>
+    <p:spTree>
+      <p:nvGrpSpPr>
+        <p:cNvPr id="1" name=""/>
+        <p:cNvGrpSpPr/>
+        <p:nvPr/>
+      </p:nvGrpSpPr>
+      <p:grpSpPr>
+        <a:xfrm>
+          <a:off x="0" y="0"/>
+          <a:ext cx="0" cy="0"/>
+          <a:chOff x="0" y="0"/>
+          <a:chExt cx="0" cy="0"/>
+        </a:xfrm>
+      </p:grpSpPr>
+      <p:sp>
+        <p:nvSpPr>
+          <p:cNvPr id="2" name="Slide Image Placeholder 1"/>
+          <p:cNvSpPr>
+            <a:spLocks noGrp="1" noRot="1" noChangeAspect="1"/>
+          </p:cNvSpPr>
+          <p:nvPr>
+            <p:ph type="sldImg"/>
+          </p:nvPr>
+        </p:nvSpPr>
+        <p:spPr/>
+      </p:sp>
+      <p:sp>
+        <p:nvSpPr>
+          <p:cNvPr id="3" name="Notes Placeholder 2"/>
+          <p:cNvSpPr>
+            <a:spLocks noGrp="1"/>
+          </p:cNvSpPr>
+          <p:nvPr>
+            <p:ph type="body" idx="1"/>
+          </p:nvPr>
+        </p:nvSpPr>
+        <p:spPr/>
+        <p:txBody>
+          <a:bodyPr/>
+          <a:lstStyle/>
+          <a:p>
+            <a:r>
+              <a:rPr lang="en-US" dirty="0"/>
+              <a:t>These are the references and picture credits used to prepare this lesson.</a:t>
+            </a:r>
+            <a:endParaRPr lang="en-US" dirty="0"/>
+          </a:p>
+        </p:txBody>
+      </p:sp>
+      <p:sp>
+        <p:nvSpPr>
+          <p:cNvPr id="4" name="Slide Number Placeholder 3"/>
+          <p:cNvSpPr>
+            <a:spLocks noGrp="1"/>
+          </p:cNvSpPr>
+          <p:nvPr>
+            <p:ph type="sldNum" sz="quarter" idx="10"/>
+          </p:nvPr>
+        </p:nvSpPr>
+        <p:spPr/>
+        <p:txBody>
+          <a:bodyPr/>
+          <a:lstStyle/>
+          <a:p>
+            <a:fld id="{F7021451-1387-4CA6-816F-3879F97B5CBC}" type="slidenum">
+              <a:rPr lang="en-US"/>
+              <a:t>55</a:t>
             </a:fld>
             <a:endParaRPr lang="en-US"/>
           </a:p>
@@ -14755,8 +14933,47 @@
         </p:nvSpPr>
         <p:spPr>
           <a:xfrm>
-            <a:off x="4069080" y="1783080"/>
-            <a:ext cx="7802575" cy="4663440"/>
+            <a:off x="4069080" y="1737360"/>
+            <a:ext cx="7802575" cy="457200"/>
+          </a:xfrm>
+          <a:prstGeom prst="rect">
+            <a:avLst/>
+          </a:prstGeom>
+          <a:noFill/>
+          <a:ln/>
+        </p:spPr>
+        <p:txBody>
+          <a:bodyPr wrap="square" lIns="0" tIns="0" rIns="0" bIns="0" rtlCol="0" anchor="ctr"/>
+          <a:lstStyle/>
+          <a:p>
+            <a:pPr algn="l" indent="0" marL="0">
+              <a:buNone/>
+            </a:pPr>
+            <a:r>
+              <a:rPr lang="en-US" sz="3200" b="1" dirty="0">
+                <a:solidFill>
+                  <a:srgbClr val="990011"/>
+                </a:solidFill>
+                <a:latin typeface="Times New Roman" pitchFamily="34" charset="0"/>
+                <a:ea typeface="Times New Roman" pitchFamily="34" charset="-122"/>
+                <a:cs typeface="Times New Roman" pitchFamily="34" charset="-120"/>
+              </a:rPr>
+              <a:t>A) Advantages</a:t>
+            </a:r>
+            <a:endParaRPr lang="en-US" sz="3200" dirty="0"/>
+          </a:p>
+        </p:txBody>
+      </p:sp>
+      <p:sp>
+        <p:nvSpPr>
+          <p:cNvPr id="6" name="Text 3"/>
+          <p:cNvSpPr/>
+          <p:nvPr/>
+        </p:nvSpPr>
+        <p:spPr>
+          <a:xfrm>
+            <a:off x="4069080" y="2240280"/>
+            <a:ext cx="7802575" cy="4206240"/>
           </a:xfrm>
           <a:prstGeom prst="rect">
             <a:avLst/>
@@ -14783,7 +15000,7 @@
                 <a:ea typeface="Times New Roman" pitchFamily="34" charset="-122"/>
                 <a:cs typeface="Times New Roman" pitchFamily="34" charset="-120"/>
               </a:rPr>
-              <a:t>Telecommunication has the following effects:</a:t>
+              <a:t>Telecommunication has the following advantages:</a:t>
             </a:r>
             <a:endParaRPr lang="en-US" sz="4000" dirty="0"/>
           </a:p>
@@ -14803,7 +15020,7 @@
                 <a:ea typeface="Times New Roman" pitchFamily="34" charset="-122"/>
                 <a:cs typeface="Times New Roman" pitchFamily="34" charset="-120"/>
               </a:rPr>
-              <a:t>Advantages: </a:t>
+              <a:t>Speed: </a:t>
             </a:r>
             <a:pPr algn="l" indent="0" marL="0">
               <a:spcAft>
@@ -14820,7 +15037,7 @@
                 <a:ea typeface="Times New Roman" pitchFamily="34" charset="-122"/>
                 <a:cs typeface="Times New Roman" pitchFamily="34" charset="-120"/>
               </a:rPr>
-              <a:t>It is fast, reduces distance and creates jobs.</a:t>
+              <a:t>Messages arrive in seconds.</a:t>
             </a:r>
             <a:endParaRPr lang="en-US" sz="4000" dirty="0"/>
           </a:p>
@@ -14840,7 +15057,7 @@
                 <a:ea typeface="Times New Roman" pitchFamily="34" charset="-122"/>
                 <a:cs typeface="Times New Roman" pitchFamily="34" charset="-120"/>
               </a:rPr>
-              <a:t>Disadvantages: </a:t>
+              <a:t>Shorter distances: </a:t>
             </a:r>
             <a:pPr algn="l" indent="0" marL="0">
               <a:spcAft>
@@ -14857,7 +15074,7 @@
                 <a:ea typeface="Times New Roman" pitchFamily="34" charset="-122"/>
                 <a:cs typeface="Times New Roman" pitchFamily="34" charset="-120"/>
               </a:rPr>
-              <a:t>Cybercrime, viruses, false news and addiction are problems.</a:t>
+              <a:t>People far apart can talk and see each other.</a:t>
             </a:r>
             <a:endParaRPr lang="en-US" sz="4000" dirty="0"/>
           </a:p>
@@ -15273,7 +15490,7 @@
                 <a:ea typeface="Times New Roman" pitchFamily="34" charset="-122"/>
                 <a:cs typeface="Times New Roman" pitchFamily="34" charset="-120"/>
               </a:rPr>
-              <a:t>3. Advantages, Disadvantages and Socio-economic Impacts (continued)</a:t>
+              <a:t>3. Advantages, Disadvantages and Socio-economic Impacts</a:t>
             </a:r>
             <a:endParaRPr lang="en-US" sz="3600" dirty="0"/>
           </a:p>
@@ -15287,8 +15504,47 @@
         </p:nvSpPr>
         <p:spPr>
           <a:xfrm>
-            <a:off x="5349240" y="1783080"/>
-            <a:ext cx="6522415" cy="4663440"/>
+            <a:off x="5349240" y="1737360"/>
+            <a:ext cx="6522415" cy="457200"/>
+          </a:xfrm>
+          <a:prstGeom prst="rect">
+            <a:avLst/>
+          </a:prstGeom>
+          <a:noFill/>
+          <a:ln/>
+        </p:spPr>
+        <p:txBody>
+          <a:bodyPr wrap="square" lIns="0" tIns="0" rIns="0" bIns="0" rtlCol="0" anchor="ctr"/>
+          <a:lstStyle/>
+          <a:p>
+            <a:pPr algn="l" indent="0" marL="0">
+              <a:buNone/>
+            </a:pPr>
+            <a:r>
+              <a:rPr lang="en-US" sz="3200" b="1" dirty="0">
+                <a:solidFill>
+                  <a:srgbClr val="990011"/>
+                </a:solidFill>
+                <a:latin typeface="Times New Roman" pitchFamily="34" charset="0"/>
+                <a:ea typeface="Times New Roman" pitchFamily="34" charset="-122"/>
+                <a:cs typeface="Times New Roman" pitchFamily="34" charset="-120"/>
+              </a:rPr>
+              <a:t>A) Advantages (continued)</a:t>
+            </a:r>
+            <a:endParaRPr lang="en-US" sz="3200" dirty="0"/>
+          </a:p>
+        </p:txBody>
+      </p:sp>
+      <p:sp>
+        <p:nvSpPr>
+          <p:cNvPr id="6" name="Text 3"/>
+          <p:cNvSpPr/>
+          <p:nvPr/>
+        </p:nvSpPr>
+        <p:spPr>
+          <a:xfrm>
+            <a:off x="5349240" y="2240280"/>
+            <a:ext cx="6522415" cy="4206240"/>
           </a:xfrm>
           <a:prstGeom prst="rect">
             <a:avLst/>
@@ -15315,7 +15571,7 @@
                 <a:ea typeface="Times New Roman" pitchFamily="34" charset="-122"/>
                 <a:cs typeface="Times New Roman" pitchFamily="34" charset="-120"/>
               </a:rPr>
-              <a:t>Socio-economic impacts: </a:t>
+              <a:t>Jobs and business: </a:t>
             </a:r>
             <a:pPr algn="l" indent="0" marL="0">
               <a:spcAft>
@@ -15444,7 +15700,7 @@
                 <a:ea typeface="Calibri" pitchFamily="34" charset="-122"/>
                 <a:cs typeface="Calibri" pitchFamily="34" charset="-120"/>
               </a:rPr>
-              <a:t>FORMATIVE EVALUATION</a:t>
+              <a:t>BOARD SUMMARY</a:t>
             </a:r>
             <a:endParaRPr lang="en-US" sz="1400" dirty="0"/>
           </a:p>
@@ -15509,7 +15765,7 @@
                 <a:ea typeface="Times New Roman" pitchFamily="34" charset="-122"/>
                 <a:cs typeface="Times New Roman" pitchFamily="34" charset="-120"/>
               </a:rPr>
-              <a:t>Evaluation 1</a:t>
+              <a:t>3. Advantages, Disadvantages and Socio-economic Impacts</a:t>
             </a:r>
             <a:endParaRPr lang="en-US" sz="3600" dirty="0"/>
           </a:p>
@@ -15523,8 +15779,47 @@
         </p:nvSpPr>
         <p:spPr>
           <a:xfrm>
-            <a:off x="5349240" y="1783080"/>
-            <a:ext cx="6522415" cy="4663440"/>
+            <a:off x="5349240" y="1737360"/>
+            <a:ext cx="6522415" cy="457200"/>
+          </a:xfrm>
+          <a:prstGeom prst="rect">
+            <a:avLst/>
+          </a:prstGeom>
+          <a:noFill/>
+          <a:ln/>
+        </p:spPr>
+        <p:txBody>
+          <a:bodyPr wrap="square" lIns="0" tIns="0" rIns="0" bIns="0" rtlCol="0" anchor="ctr"/>
+          <a:lstStyle/>
+          <a:p>
+            <a:pPr algn="l" indent="0" marL="0">
+              <a:buNone/>
+            </a:pPr>
+            <a:r>
+              <a:rPr lang="en-US" sz="3200" b="1" dirty="0">
+                <a:solidFill>
+                  <a:srgbClr val="990011"/>
+                </a:solidFill>
+                <a:latin typeface="Times New Roman" pitchFamily="34" charset="0"/>
+                <a:ea typeface="Times New Roman" pitchFamily="34" charset="-122"/>
+                <a:cs typeface="Times New Roman" pitchFamily="34" charset="-120"/>
+              </a:rPr>
+              <a:t>B) Disadvantages</a:t>
+            </a:r>
+            <a:endParaRPr lang="en-US" sz="3200" dirty="0"/>
+          </a:p>
+        </p:txBody>
+      </p:sp>
+      <p:sp>
+        <p:nvSpPr>
+          <p:cNvPr id="6" name="Text 3"/>
+          <p:cNvSpPr/>
+          <p:nvPr/>
+        </p:nvSpPr>
+        <p:spPr>
+          <a:xfrm>
+            <a:off x="5349240" y="2240280"/>
+            <a:ext cx="6522415" cy="4206240"/>
           </a:xfrm>
           <a:prstGeom prst="rect">
             <a:avLst/>
@@ -15543,7 +15838,7 @@
               <a:buNone/>
             </a:pPr>
             <a:r>
-              <a:rPr lang="en-US" sz="4000" dirty="0">
+              <a:rPr lang="en-US" sz="4000" i="1" dirty="0">
                 <a:solidFill>
                   <a:srgbClr val="111111"/>
                 </a:solidFill>
@@ -15551,7 +15846,81 @@
                 <a:ea typeface="Times New Roman" pitchFamily="34" charset="-122"/>
                 <a:cs typeface="Times New Roman" pitchFamily="34" charset="-120"/>
               </a:rPr>
-              <a:t>Name two telecommunication networks.</a:t>
+              <a:t>Telecommunication has the following disadvantages:</a:t>
+            </a:r>
+            <a:endParaRPr lang="en-US" sz="4000" dirty="0"/>
+          </a:p>
+          <a:p>
+            <a:pPr algn="l" indent="0" marL="0">
+              <a:spcAft>
+                <a:spcPts val="800"/>
+              </a:spcAft>
+              <a:buNone/>
+            </a:pPr>
+            <a:r>
+              <a:rPr lang="en-US" sz="4000" b="1" dirty="0">
+                <a:solidFill>
+                  <a:srgbClr val="111111"/>
+                </a:solidFill>
+                <a:latin typeface="Times New Roman" pitchFamily="34" charset="0"/>
+                <a:ea typeface="Times New Roman" pitchFamily="34" charset="-122"/>
+                <a:cs typeface="Times New Roman" pitchFamily="34" charset="-120"/>
+              </a:rPr>
+              <a:t>Cybercrime: </a:t>
+            </a:r>
+            <a:pPr algn="l" indent="0" marL="0">
+              <a:spcAft>
+                <a:spcPts val="800"/>
+              </a:spcAft>
+              <a:buNone/>
+            </a:pPr>
+            <a:r>
+              <a:rPr lang="en-US" sz="4000" dirty="0">
+                <a:solidFill>
+                  <a:srgbClr val="111111"/>
+                </a:solidFill>
+                <a:latin typeface="Times New Roman" pitchFamily="34" charset="0"/>
+                <a:ea typeface="Times New Roman" pitchFamily="34" charset="-122"/>
+                <a:cs typeface="Times New Roman" pitchFamily="34" charset="-120"/>
+              </a:rPr>
+              <a:t>Criminals steal money and data online.</a:t>
+            </a:r>
+            <a:endParaRPr lang="en-US" sz="4000" dirty="0"/>
+          </a:p>
+          <a:p>
+            <a:pPr algn="l" indent="0" marL="0">
+              <a:spcAft>
+                <a:spcPts val="800"/>
+              </a:spcAft>
+              <a:buNone/>
+            </a:pPr>
+            <a:r>
+              <a:rPr lang="en-US" sz="4000" b="1" dirty="0">
+                <a:solidFill>
+                  <a:srgbClr val="111111"/>
+                </a:solidFill>
+                <a:latin typeface="Times New Roman" pitchFamily="34" charset="0"/>
+                <a:ea typeface="Times New Roman" pitchFamily="34" charset="-122"/>
+                <a:cs typeface="Times New Roman" pitchFamily="34" charset="-120"/>
+              </a:rPr>
+              <a:t>Viruses: </a:t>
+            </a:r>
+            <a:pPr algn="l" indent="0" marL="0">
+              <a:spcAft>
+                <a:spcPts val="800"/>
+              </a:spcAft>
+              <a:buNone/>
+            </a:pPr>
+            <a:r>
+              <a:rPr lang="en-US" sz="4000" dirty="0">
+                <a:solidFill>
+                  <a:srgbClr val="111111"/>
+                </a:solidFill>
+                <a:latin typeface="Times New Roman" pitchFamily="34" charset="0"/>
+                <a:ea typeface="Times New Roman" pitchFamily="34" charset="-122"/>
+                <a:cs typeface="Times New Roman" pitchFamily="34" charset="-120"/>
+              </a:rPr>
+              <a:t>They damage computers and phones.</a:t>
             </a:r>
             <a:endParaRPr lang="en-US" sz="4000" dirty="0"/>
           </a:p>
@@ -15663,7 +16032,7 @@
                 <a:ea typeface="Calibri" pitchFamily="34" charset="-122"/>
                 <a:cs typeface="Calibri" pitchFamily="34" charset="-120"/>
               </a:rPr>
-              <a:t>FORMATIVE EVALUATION</a:t>
+              <a:t>BOARD SUMMARY</a:t>
             </a:r>
             <a:endParaRPr lang="en-US" sz="1400" dirty="0"/>
           </a:p>
@@ -15728,7 +16097,7 @@
                 <a:ea typeface="Times New Roman" pitchFamily="34" charset="-122"/>
                 <a:cs typeface="Times New Roman" pitchFamily="34" charset="-120"/>
               </a:rPr>
-              <a:t>Expected Answer</a:t>
+              <a:t>3. Advantages, Disadvantages and Socio-economic Impacts</a:t>
             </a:r>
             <a:endParaRPr lang="en-US" sz="3600" dirty="0"/>
           </a:p>
@@ -15742,8 +16111,47 @@
         </p:nvSpPr>
         <p:spPr>
           <a:xfrm>
-            <a:off x="5349240" y="1783080"/>
-            <a:ext cx="6522415" cy="4663440"/>
+            <a:off x="5349240" y="1737360"/>
+            <a:ext cx="6522415" cy="457200"/>
+          </a:xfrm>
+          <a:prstGeom prst="rect">
+            <a:avLst/>
+          </a:prstGeom>
+          <a:noFill/>
+          <a:ln/>
+        </p:spPr>
+        <p:txBody>
+          <a:bodyPr wrap="square" lIns="0" tIns="0" rIns="0" bIns="0" rtlCol="0" anchor="ctr"/>
+          <a:lstStyle/>
+          <a:p>
+            <a:pPr algn="l" indent="0" marL="0">
+              <a:buNone/>
+            </a:pPr>
+            <a:r>
+              <a:rPr lang="en-US" sz="3200" b="1" dirty="0">
+                <a:solidFill>
+                  <a:srgbClr val="990011"/>
+                </a:solidFill>
+                <a:latin typeface="Times New Roman" pitchFamily="34" charset="0"/>
+                <a:ea typeface="Times New Roman" pitchFamily="34" charset="-122"/>
+                <a:cs typeface="Times New Roman" pitchFamily="34" charset="-120"/>
+              </a:rPr>
+              <a:t>B) Disadvantages (continued)</a:t>
+            </a:r>
+            <a:endParaRPr lang="en-US" sz="3200" dirty="0"/>
+          </a:p>
+        </p:txBody>
+      </p:sp>
+      <p:sp>
+        <p:nvSpPr>
+          <p:cNvPr id="6" name="Text 3"/>
+          <p:cNvSpPr/>
+          <p:nvPr/>
+        </p:nvSpPr>
+        <p:spPr>
+          <a:xfrm>
+            <a:off x="5349240" y="2240280"/>
+            <a:ext cx="6522415" cy="4206240"/>
           </a:xfrm>
           <a:prstGeom prst="rect">
             <a:avLst/>
@@ -15762,7 +16170,7 @@
               <a:buNone/>
             </a:pPr>
             <a:r>
-              <a:rPr lang="en-US" sz="4000" dirty="0">
+              <a:rPr lang="en-US" sz="4000" b="1" dirty="0">
                 <a:solidFill>
                   <a:srgbClr val="111111"/>
                 </a:solidFill>
@@ -15770,7 +16178,61 @@
                 <a:ea typeface="Times New Roman" pitchFamily="34" charset="-122"/>
                 <a:cs typeface="Times New Roman" pitchFamily="34" charset="-120"/>
               </a:rPr>
-              <a:t>Mobile networks and the internet.</a:t>
+              <a:t>False news: </a:t>
+            </a:r>
+            <a:pPr algn="l" indent="0" marL="0">
+              <a:spcAft>
+                <a:spcPts val="800"/>
+              </a:spcAft>
+              <a:buNone/>
+            </a:pPr>
+            <a:r>
+              <a:rPr lang="en-US" sz="4000" dirty="0">
+                <a:solidFill>
+                  <a:srgbClr val="111111"/>
+                </a:solidFill>
+                <a:latin typeface="Times New Roman" pitchFamily="34" charset="0"/>
+                <a:ea typeface="Times New Roman" pitchFamily="34" charset="-122"/>
+                <a:cs typeface="Times New Roman" pitchFamily="34" charset="-120"/>
+              </a:rPr>
+              <a:t>Wrong information spreads quickly.</a:t>
+            </a:r>
+            <a:endParaRPr lang="en-US" sz="4000" dirty="0"/>
+          </a:p>
+          <a:p>
+            <a:pPr algn="l" indent="0" marL="0">
+              <a:spcAft>
+                <a:spcPts val="800"/>
+              </a:spcAft>
+              <a:buNone/>
+            </a:pPr>
+            <a:r>
+              <a:rPr lang="en-US" sz="4000" b="1" dirty="0">
+                <a:solidFill>
+                  <a:srgbClr val="111111"/>
+                </a:solidFill>
+                <a:latin typeface="Times New Roman" pitchFamily="34" charset="0"/>
+                <a:ea typeface="Times New Roman" pitchFamily="34" charset="-122"/>
+                <a:cs typeface="Times New Roman" pitchFamily="34" charset="-120"/>
+              </a:rPr>
+              <a:t>Addiction: </a:t>
+            </a:r>
+            <a:pPr algn="l" indent="0" marL="0">
+              <a:spcAft>
+                <a:spcPts val="800"/>
+              </a:spcAft>
+              <a:buNone/>
+            </a:pPr>
+            <a:r>
+              <a:rPr lang="en-US" sz="4000" dirty="0">
+                <a:solidFill>
+                  <a:srgbClr val="111111"/>
+                </a:solidFill>
+                <a:latin typeface="Times New Roman" pitchFamily="34" charset="0"/>
+                <a:ea typeface="Times New Roman" pitchFamily="34" charset="-122"/>
+                <a:cs typeface="Times New Roman" pitchFamily="34" charset="-120"/>
+              </a:rPr>
+              <a:t>Some people spend too much time online.</a:t>
             </a:r>
             <a:endParaRPr lang="en-US" sz="4000" dirty="0"/>
           </a:p>
@@ -15947,7 +16409,7 @@
                 <a:ea typeface="Times New Roman" pitchFamily="34" charset="-122"/>
                 <a:cs typeface="Times New Roman" pitchFamily="34" charset="-120"/>
               </a:rPr>
-              <a:t>Evaluation 2</a:t>
+              <a:t>Evaluation 1</a:t>
             </a:r>
             <a:endParaRPr lang="en-US" sz="3600" dirty="0"/>
           </a:p>
@@ -15989,7 +16451,7 @@
                 <a:ea typeface="Times New Roman" pitchFamily="34" charset="-122"/>
                 <a:cs typeface="Times New Roman" pitchFamily="34" charset="-120"/>
               </a:rPr>
-              <a:t>Give one advantage and one disadvantage of the internet.</a:t>
+              <a:t>Name two telecommunication networks.</a:t>
             </a:r>
             <a:endParaRPr lang="en-US" sz="4000" dirty="0"/>
           </a:p>
@@ -16208,7 +16670,7 @@
                 <a:ea typeface="Times New Roman" pitchFamily="34" charset="-122"/>
                 <a:cs typeface="Times New Roman" pitchFamily="34" charset="-120"/>
               </a:rPr>
-              <a:t>Fast communication; cybercrime.</a:t>
+              <a:t>Mobile networks and the internet.</a:t>
             </a:r>
             <a:endParaRPr lang="en-US" sz="4000" dirty="0"/>
           </a:p>
@@ -16320,7 +16782,7 @@
                 <a:ea typeface="Calibri" pitchFamily="34" charset="-122"/>
                 <a:cs typeface="Calibri" pitchFamily="34" charset="-120"/>
               </a:rPr>
-              <a:t>REMEDIATION</a:t>
+              <a:t>FORMATIVE EVALUATION</a:t>
             </a:r>
             <a:endParaRPr lang="en-US" sz="1400" dirty="0"/>
           </a:p>
@@ -16343,7 +16805,7 @@
         <p:spPr>
           <a:xfrm>
             <a:off x="0" y="658368"/>
-            <a:ext cx="1463040" cy="5833872"/>
+            <a:ext cx="5120640" cy="5833872"/>
           </a:xfrm>
           <a:prstGeom prst="rect">
             <a:avLst/>
@@ -16358,8 +16820,8 @@
         </p:nvSpPr>
         <p:spPr>
           <a:xfrm>
-            <a:off x="1691640" y="1005840"/>
-            <a:ext cx="10180015" cy="731520"/>
+            <a:off x="5349240" y="1005840"/>
+            <a:ext cx="6522415" cy="731520"/>
           </a:xfrm>
           <a:prstGeom prst="rect">
             <a:avLst/>
@@ -16385,7 +16847,7 @@
                 <a:ea typeface="Times New Roman" pitchFamily="34" charset="-122"/>
                 <a:cs typeface="Times New Roman" pitchFamily="34" charset="-120"/>
               </a:rPr>
-              <a:t>Remediation</a:t>
+              <a:t>Evaluation 2</a:t>
             </a:r>
             <a:endParaRPr lang="en-US" sz="3600" dirty="0"/>
           </a:p>
@@ -16399,8 +16861,8 @@
         </p:nvSpPr>
         <p:spPr>
           <a:xfrm>
-            <a:off x="1691640" y="1783080"/>
-            <a:ext cx="10180015" cy="4663440"/>
+            <a:off x="5349240" y="1783080"/>
+            <a:ext cx="6522415" cy="4663440"/>
           </a:xfrm>
           <a:prstGeom prst="rect">
             <a:avLst/>
@@ -16419,7 +16881,7 @@
               <a:buNone/>
             </a:pPr>
             <a:r>
-              <a:rPr lang="en-US" sz="4000" b="1" dirty="0">
+              <a:rPr lang="en-US" sz="4000" dirty="0">
                 <a:solidFill>
                   <a:srgbClr val="111111"/>
                 </a:solidFill>
@@ -16427,73 +16889,7 @@
                 <a:ea typeface="Times New Roman" pitchFamily="34" charset="-122"/>
                 <a:cs typeface="Times New Roman" pitchFamily="34" charset="-120"/>
               </a:rPr>
-              <a:t>Fill in the blanks:</a:t>
-            </a:r>
-            <a:endParaRPr lang="en-US" sz="4000" dirty="0"/>
-          </a:p>
-          <a:p>
-            <a:pPr algn="l" marL="342900" indent="-342900">
-              <a:spcAft>
-                <a:spcPts val="800"/>
-              </a:spcAft>
-              <a:buSzPct val="100000"/>
-              <a:buFont typeface="+mj-lt"/>
-              <a:buAutoNum type="arabicPeriod" startAt="1"/>
-            </a:pPr>
-            <a:r>
-              <a:rPr lang="en-US" sz="4000" dirty="0">
-                <a:solidFill>
-                  <a:srgbClr val="111111"/>
-                </a:solidFill>
-                <a:latin typeface="Times New Roman" pitchFamily="34" charset="0"/>
-                <a:ea typeface="Times New Roman" pitchFamily="34" charset="-122"/>
-                <a:cs typeface="Times New Roman" pitchFamily="34" charset="-120"/>
-              </a:rPr>
-              <a:t>Glass cables that carry data are optic ______.</a:t>
-            </a:r>
-            <a:endParaRPr lang="en-US" sz="4000" dirty="0"/>
-          </a:p>
-          <a:p>
-            <a:pPr algn="l" marL="342900" indent="-342900">
-              <a:spcAft>
-                <a:spcPts val="800"/>
-              </a:spcAft>
-              <a:buSzPct val="100000"/>
-              <a:buFont typeface="+mj-lt"/>
-              <a:buAutoNum type="arabicPeriod" startAt="1"/>
-            </a:pPr>
-            <a:r>
-              <a:rPr lang="en-US" sz="4000" dirty="0">
-                <a:solidFill>
-                  <a:srgbClr val="111111"/>
-                </a:solidFill>
-                <a:latin typeface="Times New Roman" pitchFamily="34" charset="0"/>
-                <a:ea typeface="Times New Roman" pitchFamily="34" charset="-122"/>
-                <a:cs typeface="Times New Roman" pitchFamily="34" charset="-120"/>
-              </a:rPr>
-              <a:t>Sending money by phone is mobile ______.</a:t>
-            </a:r>
-            <a:endParaRPr lang="en-US" sz="4000" dirty="0"/>
-          </a:p>
-          <a:p>
-            <a:pPr algn="l" marL="342900" indent="-342900">
-              <a:spcAft>
-                <a:spcPts val="800"/>
-              </a:spcAft>
-              <a:buSzPct val="100000"/>
-              <a:buFont typeface="+mj-lt"/>
-              <a:buAutoNum type="arabicPeriod" startAt="1"/>
-            </a:pPr>
-            <a:r>
-              <a:rPr lang="en-US" sz="4000" dirty="0">
-                <a:solidFill>
-                  <a:srgbClr val="111111"/>
-                </a:solidFill>
-                <a:latin typeface="Times New Roman" pitchFamily="34" charset="0"/>
-                <a:ea typeface="Times New Roman" pitchFamily="34" charset="-122"/>
-                <a:cs typeface="Times New Roman" pitchFamily="34" charset="-120"/>
-              </a:rPr>
-              <a:t>Crime committed on the internet is ______.</a:t>
+              <a:t>Give one advantage and one disadvantage of the internet.</a:t>
             </a:r>
             <a:endParaRPr lang="en-US" sz="4000" dirty="0"/>
           </a:p>
@@ -16605,7 +17001,7 @@
                 <a:ea typeface="Calibri" pitchFamily="34" charset="-122"/>
                 <a:cs typeface="Calibri" pitchFamily="34" charset="-120"/>
               </a:rPr>
-              <a:t>HOMEWORK</a:t>
+              <a:t>FORMATIVE EVALUATION</a:t>
             </a:r>
             <a:endParaRPr lang="en-US" sz="1400" dirty="0"/>
           </a:p>
@@ -16670,7 +17066,7 @@
                 <a:ea typeface="Times New Roman" pitchFamily="34" charset="-122"/>
                 <a:cs typeface="Times New Roman" pitchFamily="34" charset="-120"/>
               </a:rPr>
-              <a:t>Homework</a:t>
+              <a:t>Expected Answer</a:t>
             </a:r>
             <a:endParaRPr lang="en-US" sz="3600" dirty="0"/>
           </a:p>
@@ -16712,7 +17108,7 @@
                 <a:ea typeface="Times New Roman" pitchFamily="34" charset="-122"/>
                 <a:cs typeface="Times New Roman" pitchFamily="34" charset="-120"/>
               </a:rPr>
-              <a:t>Give three ways telecommunication helps farmers and traders in your area.</a:t>
+              <a:t>Fast communication; cybercrime.</a:t>
             </a:r>
             <a:endParaRPr lang="en-US" sz="4000" dirty="0"/>
           </a:p>
@@ -16824,7 +17220,7 @@
                 <a:ea typeface="Calibri" pitchFamily="34" charset="-122"/>
                 <a:cs typeface="Calibri" pitchFamily="34" charset="-120"/>
               </a:rPr>
-              <a:t>NEXT LESSON</a:t>
+              <a:t>REMEDIATION</a:t>
             </a:r>
             <a:endParaRPr lang="en-US" sz="1400" dirty="0"/>
           </a:p>
@@ -16847,7 +17243,7 @@
         <p:spPr>
           <a:xfrm>
             <a:off x="0" y="658368"/>
-            <a:ext cx="5120640" cy="5833872"/>
+            <a:ext cx="1463040" cy="5833872"/>
           </a:xfrm>
           <a:prstGeom prst="rect">
             <a:avLst/>
@@ -16862,8 +17258,8 @@
         </p:nvSpPr>
         <p:spPr>
           <a:xfrm>
-            <a:off x="5349240" y="1005840"/>
-            <a:ext cx="6522415" cy="731520"/>
+            <a:off x="1691640" y="1005840"/>
+            <a:ext cx="10180015" cy="731520"/>
           </a:xfrm>
           <a:prstGeom prst="rect">
             <a:avLst/>
@@ -16889,7 +17285,7 @@
                 <a:ea typeface="Times New Roman" pitchFamily="34" charset="-122"/>
                 <a:cs typeface="Times New Roman" pitchFamily="34" charset="-120"/>
               </a:rPr>
-              <a:t>Next Lesson</a:t>
+              <a:t>Remediation</a:t>
             </a:r>
             <a:endParaRPr lang="en-US" sz="3600" dirty="0"/>
           </a:p>
@@ -16903,8 +17299,8 @@
         </p:nvSpPr>
         <p:spPr>
           <a:xfrm>
-            <a:off x="5349240" y="1783080"/>
-            <a:ext cx="6522415" cy="4663440"/>
+            <a:off x="1691640" y="1783080"/>
+            <a:ext cx="10180015" cy="4663440"/>
           </a:xfrm>
           <a:prstGeom prst="rect">
             <a:avLst/>
@@ -16913,10 +17309,10 @@
           <a:ln/>
         </p:spPr>
         <p:txBody>
-          <a:bodyPr wrap="square" lIns="0" tIns="0" rIns="0" bIns="0" rtlCol="0" anchor="ctr"/>
-          <a:lstStyle/>
-          <a:p>
-            <a:pPr algn="ctr" indent="0" marL="0">
+          <a:bodyPr wrap="square" lIns="0" tIns="0" rIns="0" bIns="0" rtlCol="0" anchor="t"/>
+          <a:lstStyle/>
+          <a:p>
+            <a:pPr algn="l" indent="0" marL="0">
               <a:spcAft>
                 <a:spcPts val="800"/>
               </a:spcAft>
@@ -16931,27 +17327,73 @@
                 <a:ea typeface="Times New Roman" pitchFamily="34" charset="-122"/>
                 <a:cs typeface="Times New Roman" pitchFamily="34" charset="-120"/>
               </a:rPr>
-              <a:t>Our next lesson will be on:</a:t>
+              <a:t>Fill in the blanks:</a:t>
             </a:r>
             <a:endParaRPr lang="en-US" sz="4000" dirty="0"/>
           </a:p>
           <a:p>
-            <a:pPr algn="ctr" indent="0" marL="0">
+            <a:pPr algn="l" marL="342900" indent="-342900">
               <a:spcAft>
                 <a:spcPts val="800"/>
               </a:spcAft>
-              <a:buNone/>
+              <a:buSzPct val="100000"/>
+              <a:buFont typeface="+mj-lt"/>
+              <a:buAutoNum type="arabicPeriod" startAt="1"/>
             </a:pPr>
             <a:r>
-              <a:rPr lang="en-US" sz="4000" b="1" dirty="0">
-                <a:solidFill>
-                  <a:srgbClr val="990011"/>
+              <a:rPr lang="en-US" sz="4000" dirty="0">
+                <a:solidFill>
+                  <a:srgbClr val="111111"/>
                 </a:solidFill>
                 <a:latin typeface="Times New Roman" pitchFamily="34" charset="0"/>
                 <a:ea typeface="Times New Roman" pitchFamily="34" charset="-122"/>
                 <a:cs typeface="Times New Roman" pitchFamily="34" charset="-120"/>
               </a:rPr>
-              <a:t>Lesson 16: Transport Development in Cameroon</a:t>
+              <a:t>Glass cables that carry data are optic ______.</a:t>
+            </a:r>
+            <a:endParaRPr lang="en-US" sz="4000" dirty="0"/>
+          </a:p>
+          <a:p>
+            <a:pPr algn="l" marL="342900" indent="-342900">
+              <a:spcAft>
+                <a:spcPts val="800"/>
+              </a:spcAft>
+              <a:buSzPct val="100000"/>
+              <a:buFont typeface="+mj-lt"/>
+              <a:buAutoNum type="arabicPeriod" startAt="1"/>
+            </a:pPr>
+            <a:r>
+              <a:rPr lang="en-US" sz="4000" dirty="0">
+                <a:solidFill>
+                  <a:srgbClr val="111111"/>
+                </a:solidFill>
+                <a:latin typeface="Times New Roman" pitchFamily="34" charset="0"/>
+                <a:ea typeface="Times New Roman" pitchFamily="34" charset="-122"/>
+                <a:cs typeface="Times New Roman" pitchFamily="34" charset="-120"/>
+              </a:rPr>
+              <a:t>Sending money by phone is mobile ______.</a:t>
+            </a:r>
+            <a:endParaRPr lang="en-US" sz="4000" dirty="0"/>
+          </a:p>
+          <a:p>
+            <a:pPr algn="l" marL="342900" indent="-342900">
+              <a:spcAft>
+                <a:spcPts val="800"/>
+              </a:spcAft>
+              <a:buSzPct val="100000"/>
+              <a:buFont typeface="+mj-lt"/>
+              <a:buAutoNum type="arabicPeriod" startAt="1"/>
+            </a:pPr>
+            <a:r>
+              <a:rPr lang="en-US" sz="4000" dirty="0">
+                <a:solidFill>
+                  <a:srgbClr val="111111"/>
+                </a:solidFill>
+                <a:latin typeface="Times New Roman" pitchFamily="34" charset="0"/>
+                <a:ea typeface="Times New Roman" pitchFamily="34" charset="-122"/>
+                <a:cs typeface="Times New Roman" pitchFamily="34" charset="-120"/>
+              </a:rPr>
+              <a:t>Crime committed on the internet is ______.</a:t>
             </a:r>
             <a:endParaRPr lang="en-US" sz="4000" dirty="0"/>
           </a:p>
@@ -17063,6 +17505,683 @@
                 <a:ea typeface="Calibri" pitchFamily="34" charset="-122"/>
                 <a:cs typeface="Calibri" pitchFamily="34" charset="-120"/>
               </a:rPr>
+              <a:t>HOMEWORK</a:t>
+            </a:r>
+            <a:endParaRPr lang="en-US" sz="1400" dirty="0"/>
+          </a:p>
+        </p:txBody>
+      </p:sp>
+      <p:pic>
+        <p:nvPicPr>
+          <p:cNvPr id="3" name="Image 0" descr="/home/claude/f4/img/minesec_sheet.png">    </p:cNvPr>
+          <p:cNvPicPr>
+            <a:picLocks noChangeAspect="1"/>
+          </p:cNvPicPr>
+          <p:nvPr/>
+        </p:nvPicPr>
+        <p:blipFill>
+          <a:blip r:embed="rId1"/>
+          <a:stretch>
+            <a:fillRect/>
+          </a:stretch>
+        </p:blipFill>
+        <p:spPr>
+          <a:xfrm>
+            <a:off x="0" y="658368"/>
+            <a:ext cx="5120640" cy="5833872"/>
+          </a:xfrm>
+          <a:prstGeom prst="rect">
+            <a:avLst/>
+          </a:prstGeom>
+        </p:spPr>
+      </p:pic>
+      <p:sp>
+        <p:nvSpPr>
+          <p:cNvPr id="4" name="Text 1"/>
+          <p:cNvSpPr/>
+          <p:nvPr/>
+        </p:nvSpPr>
+        <p:spPr>
+          <a:xfrm>
+            <a:off x="5349240" y="1005840"/>
+            <a:ext cx="6522415" cy="731520"/>
+          </a:xfrm>
+          <a:prstGeom prst="rect">
+            <a:avLst/>
+          </a:prstGeom>
+          <a:noFill/>
+          <a:ln/>
+        </p:spPr>
+        <p:txBody>
+          <a:bodyPr wrap="square" lIns="0" tIns="0" rIns="0" bIns="0" rtlCol="0" anchor="ctr">
+            <a:normAutofit/>
+          </a:bodyPr>
+          <a:lstStyle/>
+          <a:p>
+            <a:pPr algn="ctr" indent="0" marL="0">
+              <a:buNone/>
+            </a:pPr>
+            <a:r>
+              <a:rPr lang="en-US" sz="3600" b="1" dirty="0">
+                <a:solidFill>
+                  <a:srgbClr val="990011"/>
+                </a:solidFill>
+                <a:latin typeface="Times New Roman" pitchFamily="34" charset="0"/>
+                <a:ea typeface="Times New Roman" pitchFamily="34" charset="-122"/>
+                <a:cs typeface="Times New Roman" pitchFamily="34" charset="-120"/>
+              </a:rPr>
+              <a:t>Homework</a:t>
+            </a:r>
+            <a:endParaRPr lang="en-US" sz="3600" dirty="0"/>
+          </a:p>
+        </p:txBody>
+      </p:sp>
+      <p:sp>
+        <p:nvSpPr>
+          <p:cNvPr id="5" name="Text 2"/>
+          <p:cNvSpPr/>
+          <p:nvPr/>
+        </p:nvSpPr>
+        <p:spPr>
+          <a:xfrm>
+            <a:off x="5349240" y="1783080"/>
+            <a:ext cx="6522415" cy="4663440"/>
+          </a:xfrm>
+          <a:prstGeom prst="rect">
+            <a:avLst/>
+          </a:prstGeom>
+          <a:noFill/>
+          <a:ln/>
+        </p:spPr>
+        <p:txBody>
+          <a:bodyPr wrap="square" lIns="0" tIns="0" rIns="0" bIns="0" rtlCol="0" anchor="t"/>
+          <a:lstStyle/>
+          <a:p>
+            <a:pPr algn="l" indent="0" marL="0">
+              <a:spcAft>
+                <a:spcPts val="800"/>
+              </a:spcAft>
+              <a:buNone/>
+            </a:pPr>
+            <a:r>
+              <a:rPr lang="en-US" sz="4000" dirty="0">
+                <a:solidFill>
+                  <a:srgbClr val="111111"/>
+                </a:solidFill>
+                <a:latin typeface="Times New Roman" pitchFamily="34" charset="0"/>
+                <a:ea typeface="Times New Roman" pitchFamily="34" charset="-122"/>
+                <a:cs typeface="Times New Roman" pitchFamily="34" charset="-120"/>
+              </a:rPr>
+              <a:t>Give three ways telecommunication helps farmers and traders in your area.</a:t>
+            </a:r>
+            <a:endParaRPr lang="en-US" sz="4000" dirty="0"/>
+          </a:p>
+        </p:txBody>
+      </p:sp>
+      <p:sp>
+        <p:nvSpPr>
+          <p:cNvPr id="25" name="Slide Number Placeholder 0"/>
+          <p:cNvSpPr>
+            <a:spLocks noGrp="1"/>
+          </p:cNvSpPr>
+          <p:nvPr>
+            <p:ph type="sldNum" sz="quarter" idx="4294967295"/>
+          </p:nvPr>
+        </p:nvSpPr>
+        <p:spPr>
+          <a:xfrm>
+            <a:off x="27432" y="91440"/>
+            <a:ext cx="585216" cy="475488"/>
+          </a:xfrm>
+          <a:prstGeom prst="rect">
+            <a:avLst/>
+          </a:prstGeom>
+          <a:extLst>
+            <a:ext uri="{C572A759-6A51-4108-AA02-DFA0A04FC94B}">
+              <ma14:wrappingTextBoxFlag xmlns:ma14="http://schemas.microsoft.com/office/mac/drawingml/2011/main" val="0"/>
+            </a:ext>
+          </a:extLst>
+        </p:spPr>
+        <p:txBody>
+          <a:bodyPr/>
+          <a:lstStyle>
+            <a:lvl1pPr>
+              <a:defRPr sz="2000">
+                <a:solidFill>
+                  <a:srgbClr val="FFFFFF"/>
+                </a:solidFill>
+                <a:latin typeface="Calibri"/>
+                <a:ea typeface="Calibri"/>
+                <a:cs typeface="Calibri"/>
+              </a:defRPr>
+            </a:lvl1pPr>
+          </a:lstStyle>
+          <a:p>
+            <a:pPr algn="ctr"/>
+            <a:fld id="{F7021451-1387-4CA6-816F-3879F97B5CBC}" type="slidenum">
+              <a:rPr b="1" lang="en-US"/>
+              <a:t>48</a:t>
+            </a:fld>
+            <a:endParaRPr lang="en-US"/>
+          </a:p>
+        </p:txBody>
+      </p:sp>
+    </p:spTree>
+  </p:cSld>
+  <p:clrMapOvr>
+    <a:masterClrMapping/>
+  </p:clrMapOvr>
+</p:sld>
+</file>
+
+<file path=ppt/slides/slide49.xml><?xml version="1.0" encoding="utf-8"?>
+<p:sld xmlns:a="http://schemas.openxmlformats.org/drawingml/2006/main" xmlns:r="http://schemas.openxmlformats.org/officeDocument/2006/relationships" xmlns:p="http://schemas.openxmlformats.org/presentationml/2006/main">
+  <p:cSld name="Slide 49">
+    <p:spTree>
+      <p:nvGrpSpPr>
+        <p:cNvPr id="1" name=""/>
+        <p:cNvGrpSpPr/>
+        <p:nvPr/>
+      </p:nvGrpSpPr>
+      <p:grpSpPr>
+        <a:xfrm>
+          <a:off x="0" y="0"/>
+          <a:ext cx="0" cy="0"/>
+          <a:chOff x="0" y="0"/>
+          <a:chExt cx="0" cy="0"/>
+        </a:xfrm>
+      </p:grpSpPr>
+      <p:sp>
+        <p:nvSpPr>
+          <p:cNvPr id="2" name="Text 0"/>
+          <p:cNvSpPr/>
+          <p:nvPr/>
+        </p:nvSpPr>
+        <p:spPr>
+          <a:xfrm>
+            <a:off x="457200" y="713232"/>
+            <a:ext cx="11368735" cy="274320"/>
+          </a:xfrm>
+          <a:prstGeom prst="rect">
+            <a:avLst/>
+          </a:prstGeom>
+          <a:noFill/>
+          <a:ln/>
+        </p:spPr>
+        <p:txBody>
+          <a:bodyPr wrap="square" lIns="0" tIns="0" rIns="0" bIns="0" rtlCol="0" anchor="ctr"/>
+          <a:lstStyle/>
+          <a:p>
+            <a:pPr algn="r" indent="0" marL="0">
+              <a:buNone/>
+            </a:pPr>
+            <a:r>
+              <a:rPr lang="en-US" sz="1400" b="1" dirty="0">
+                <a:solidFill>
+                  <a:srgbClr val="1C3F6E"/>
+                </a:solidFill>
+                <a:latin typeface="Calibri" pitchFamily="34" charset="0"/>
+                <a:ea typeface="Calibri" pitchFamily="34" charset="-122"/>
+                <a:cs typeface="Calibri" pitchFamily="34" charset="-120"/>
+              </a:rPr>
+              <a:t>NEXT LESSON</a:t>
+            </a:r>
+            <a:endParaRPr lang="en-US" sz="1400" dirty="0"/>
+          </a:p>
+        </p:txBody>
+      </p:sp>
+      <p:pic>
+        <p:nvPicPr>
+          <p:cNvPr id="3" name="Image 0" descr="/home/claude/f4/img/minesec_sheet.png">    </p:cNvPr>
+          <p:cNvPicPr>
+            <a:picLocks noChangeAspect="1"/>
+          </p:cNvPicPr>
+          <p:nvPr/>
+        </p:nvPicPr>
+        <p:blipFill>
+          <a:blip r:embed="rId1"/>
+          <a:stretch>
+            <a:fillRect/>
+          </a:stretch>
+        </p:blipFill>
+        <p:spPr>
+          <a:xfrm>
+            <a:off x="0" y="658368"/>
+            <a:ext cx="5120640" cy="5833872"/>
+          </a:xfrm>
+          <a:prstGeom prst="rect">
+            <a:avLst/>
+          </a:prstGeom>
+        </p:spPr>
+      </p:pic>
+      <p:sp>
+        <p:nvSpPr>
+          <p:cNvPr id="4" name="Text 1"/>
+          <p:cNvSpPr/>
+          <p:nvPr/>
+        </p:nvSpPr>
+        <p:spPr>
+          <a:xfrm>
+            <a:off x="5349240" y="1005840"/>
+            <a:ext cx="6522415" cy="731520"/>
+          </a:xfrm>
+          <a:prstGeom prst="rect">
+            <a:avLst/>
+          </a:prstGeom>
+          <a:noFill/>
+          <a:ln/>
+        </p:spPr>
+        <p:txBody>
+          <a:bodyPr wrap="square" lIns="0" tIns="0" rIns="0" bIns="0" rtlCol="0" anchor="ctr">
+            <a:normAutofit/>
+          </a:bodyPr>
+          <a:lstStyle/>
+          <a:p>
+            <a:pPr algn="ctr" indent="0" marL="0">
+              <a:buNone/>
+            </a:pPr>
+            <a:r>
+              <a:rPr lang="en-US" sz="3600" b="1" dirty="0">
+                <a:solidFill>
+                  <a:srgbClr val="990011"/>
+                </a:solidFill>
+                <a:latin typeface="Times New Roman" pitchFamily="34" charset="0"/>
+                <a:ea typeface="Times New Roman" pitchFamily="34" charset="-122"/>
+                <a:cs typeface="Times New Roman" pitchFamily="34" charset="-120"/>
+              </a:rPr>
+              <a:t>Next Lesson</a:t>
+            </a:r>
+            <a:endParaRPr lang="en-US" sz="3600" dirty="0"/>
+          </a:p>
+        </p:txBody>
+      </p:sp>
+      <p:sp>
+        <p:nvSpPr>
+          <p:cNvPr id="5" name="Text 2"/>
+          <p:cNvSpPr/>
+          <p:nvPr/>
+        </p:nvSpPr>
+        <p:spPr>
+          <a:xfrm>
+            <a:off x="5349240" y="1783080"/>
+            <a:ext cx="6522415" cy="4663440"/>
+          </a:xfrm>
+          <a:prstGeom prst="rect">
+            <a:avLst/>
+          </a:prstGeom>
+          <a:noFill/>
+          <a:ln/>
+        </p:spPr>
+        <p:txBody>
+          <a:bodyPr wrap="square" lIns="0" tIns="0" rIns="0" bIns="0" rtlCol="0" anchor="ctr"/>
+          <a:lstStyle/>
+          <a:p>
+            <a:pPr algn="ctr" indent="0" marL="0">
+              <a:spcAft>
+                <a:spcPts val="800"/>
+              </a:spcAft>
+              <a:buNone/>
+            </a:pPr>
+            <a:r>
+              <a:rPr lang="en-US" sz="4000" b="1" dirty="0">
+                <a:solidFill>
+                  <a:srgbClr val="111111"/>
+                </a:solidFill>
+                <a:latin typeface="Times New Roman" pitchFamily="34" charset="0"/>
+                <a:ea typeface="Times New Roman" pitchFamily="34" charset="-122"/>
+                <a:cs typeface="Times New Roman" pitchFamily="34" charset="-120"/>
+              </a:rPr>
+              <a:t>Our next lesson will be on:</a:t>
+            </a:r>
+            <a:endParaRPr lang="en-US" sz="4000" dirty="0"/>
+          </a:p>
+          <a:p>
+            <a:pPr algn="ctr" indent="0" marL="0">
+              <a:spcAft>
+                <a:spcPts val="800"/>
+              </a:spcAft>
+              <a:buNone/>
+            </a:pPr>
+            <a:r>
+              <a:rPr lang="en-US" sz="4000" b="1" dirty="0">
+                <a:solidFill>
+                  <a:srgbClr val="990011"/>
+                </a:solidFill>
+                <a:latin typeface="Times New Roman" pitchFamily="34" charset="0"/>
+                <a:ea typeface="Times New Roman" pitchFamily="34" charset="-122"/>
+                <a:cs typeface="Times New Roman" pitchFamily="34" charset="-120"/>
+              </a:rPr>
+              <a:t>Lesson 16: Transport Development in Cameroon</a:t>
+            </a:r>
+            <a:endParaRPr lang="en-US" sz="4000" dirty="0"/>
+          </a:p>
+        </p:txBody>
+      </p:sp>
+      <p:sp>
+        <p:nvSpPr>
+          <p:cNvPr id="25" name="Slide Number Placeholder 0"/>
+          <p:cNvSpPr>
+            <a:spLocks noGrp="1"/>
+          </p:cNvSpPr>
+          <p:nvPr>
+            <p:ph type="sldNum" sz="quarter" idx="4294967295"/>
+          </p:nvPr>
+        </p:nvSpPr>
+        <p:spPr>
+          <a:xfrm>
+            <a:off x="27432" y="91440"/>
+            <a:ext cx="585216" cy="475488"/>
+          </a:xfrm>
+          <a:prstGeom prst="rect">
+            <a:avLst/>
+          </a:prstGeom>
+          <a:extLst>
+            <a:ext uri="{C572A759-6A51-4108-AA02-DFA0A04FC94B}">
+              <ma14:wrappingTextBoxFlag xmlns:ma14="http://schemas.microsoft.com/office/mac/drawingml/2011/main" val="0"/>
+            </a:ext>
+          </a:extLst>
+        </p:spPr>
+        <p:txBody>
+          <a:bodyPr/>
+          <a:lstStyle>
+            <a:lvl1pPr>
+              <a:defRPr sz="2000">
+                <a:solidFill>
+                  <a:srgbClr val="FFFFFF"/>
+                </a:solidFill>
+                <a:latin typeface="Calibri"/>
+                <a:ea typeface="Calibri"/>
+                <a:cs typeface="Calibri"/>
+              </a:defRPr>
+            </a:lvl1pPr>
+          </a:lstStyle>
+          <a:p>
+            <a:pPr algn="ctr"/>
+            <a:fld id="{F7021451-1387-4CA6-816F-3879F97B5CBC}" type="slidenum">
+              <a:rPr b="1" lang="en-US"/>
+              <a:t>49</a:t>
+            </a:fld>
+            <a:endParaRPr lang="en-US"/>
+          </a:p>
+        </p:txBody>
+      </p:sp>
+    </p:spTree>
+  </p:cSld>
+  <p:clrMapOvr>
+    <a:masterClrMapping/>
+  </p:clrMapOvr>
+</p:sld>
+</file>
+
+<file path=ppt/slides/slide5.xml><?xml version="1.0" encoding="utf-8"?>
+<p:sld xmlns:a="http://schemas.openxmlformats.org/drawingml/2006/main" xmlns:r="http://schemas.openxmlformats.org/officeDocument/2006/relationships" xmlns:p="http://schemas.openxmlformats.org/presentationml/2006/main">
+  <p:cSld name="Slide 5">
+    <p:spTree>
+      <p:nvGrpSpPr>
+        <p:cNvPr id="1" name=""/>
+        <p:cNvGrpSpPr/>
+        <p:nvPr/>
+      </p:nvGrpSpPr>
+      <p:grpSpPr>
+        <a:xfrm>
+          <a:off x="0" y="0"/>
+          <a:ext cx="0" cy="0"/>
+          <a:chOff x="0" y="0"/>
+          <a:chExt cx="0" cy="0"/>
+        </a:xfrm>
+      </p:grpSpPr>
+      <p:sp>
+        <p:nvSpPr>
+          <p:cNvPr id="2" name="Text 0"/>
+          <p:cNvSpPr/>
+          <p:nvPr/>
+        </p:nvSpPr>
+        <p:spPr>
+          <a:xfrm>
+            <a:off x="457200" y="713232"/>
+            <a:ext cx="11368735" cy="274320"/>
+          </a:xfrm>
+          <a:prstGeom prst="rect">
+            <a:avLst/>
+          </a:prstGeom>
+          <a:noFill/>
+          <a:ln/>
+        </p:spPr>
+        <p:txBody>
+          <a:bodyPr wrap="square" lIns="0" tIns="0" rIns="0" bIns="0" rtlCol="0" anchor="ctr"/>
+          <a:lstStyle/>
+          <a:p>
+            <a:pPr algn="r" indent="0" marL="0">
+              <a:buNone/>
+            </a:pPr>
+            <a:r>
+              <a:rPr lang="en-US" sz="1400" b="1" dirty="0">
+                <a:solidFill>
+                  <a:srgbClr val="1C3F6E"/>
+                </a:solidFill>
+                <a:latin typeface="Calibri" pitchFamily="34" charset="0"/>
+                <a:ea typeface="Calibri" pitchFamily="34" charset="-122"/>
+                <a:cs typeface="Calibri" pitchFamily="34" charset="-120"/>
+              </a:rPr>
+              <a:t>HOMEWORK CORRECTION</a:t>
+            </a:r>
+            <a:endParaRPr lang="en-US" sz="1400" dirty="0"/>
+          </a:p>
+        </p:txBody>
+      </p:sp>
+      <p:pic>
+        <p:nvPicPr>
+          <p:cNvPr id="3" name="Image 0" descr="/home/claude/f4/img/minesec_sheet.png">    </p:cNvPr>
+          <p:cNvPicPr>
+            <a:picLocks noChangeAspect="1"/>
+          </p:cNvPicPr>
+          <p:nvPr/>
+        </p:nvPicPr>
+        <p:blipFill>
+          <a:blip r:embed="rId1"/>
+          <a:stretch>
+            <a:fillRect/>
+          </a:stretch>
+        </p:blipFill>
+        <p:spPr>
+          <a:xfrm>
+            <a:off x="0" y="658368"/>
+            <a:ext cx="5120640" cy="5833872"/>
+          </a:xfrm>
+          <a:prstGeom prst="rect">
+            <a:avLst/>
+          </a:prstGeom>
+        </p:spPr>
+      </p:pic>
+      <p:sp>
+        <p:nvSpPr>
+          <p:cNvPr id="4" name="Text 1"/>
+          <p:cNvSpPr/>
+          <p:nvPr/>
+        </p:nvSpPr>
+        <p:spPr>
+          <a:xfrm>
+            <a:off x="5349240" y="1005840"/>
+            <a:ext cx="6522415" cy="731520"/>
+          </a:xfrm>
+          <a:prstGeom prst="rect">
+            <a:avLst/>
+          </a:prstGeom>
+          <a:noFill/>
+          <a:ln/>
+        </p:spPr>
+        <p:txBody>
+          <a:bodyPr wrap="square" lIns="0" tIns="0" rIns="0" bIns="0" rtlCol="0" anchor="ctr">
+            <a:normAutofit/>
+          </a:bodyPr>
+          <a:lstStyle/>
+          <a:p>
+            <a:pPr algn="ctr" indent="0" marL="0">
+              <a:buNone/>
+            </a:pPr>
+            <a:r>
+              <a:rPr lang="en-US" sz="3600" b="1" dirty="0">
+                <a:solidFill>
+                  <a:srgbClr val="990011"/>
+                </a:solidFill>
+                <a:latin typeface="Times New Roman" pitchFamily="34" charset="0"/>
+                <a:ea typeface="Times New Roman" pitchFamily="34" charset="-122"/>
+                <a:cs typeface="Times New Roman" pitchFamily="34" charset="-120"/>
+              </a:rPr>
+              <a:t>Correction: Possible Answer</a:t>
+            </a:r>
+            <a:endParaRPr lang="en-US" sz="3600" dirty="0"/>
+          </a:p>
+        </p:txBody>
+      </p:sp>
+      <p:sp>
+        <p:nvSpPr>
+          <p:cNvPr id="5" name="Text 2"/>
+          <p:cNvSpPr/>
+          <p:nvPr/>
+        </p:nvSpPr>
+        <p:spPr>
+          <a:xfrm>
+            <a:off x="5349240" y="1783080"/>
+            <a:ext cx="6522415" cy="4663440"/>
+          </a:xfrm>
+          <a:prstGeom prst="rect">
+            <a:avLst/>
+          </a:prstGeom>
+          <a:noFill/>
+          <a:ln/>
+        </p:spPr>
+        <p:txBody>
+          <a:bodyPr wrap="square" lIns="0" tIns="0" rIns="0" bIns="0" rtlCol="0" anchor="t"/>
+          <a:lstStyle/>
+          <a:p>
+            <a:pPr algn="l" indent="0" marL="0">
+              <a:spcAft>
+                <a:spcPts val="800"/>
+              </a:spcAft>
+              <a:buNone/>
+            </a:pPr>
+            <a:r>
+              <a:rPr lang="en-US" sz="4000" dirty="0">
+                <a:solidFill>
+                  <a:srgbClr val="111111"/>
+                </a:solidFill>
+                <a:latin typeface="Times New Roman" pitchFamily="34" charset="0"/>
+                <a:ea typeface="Times New Roman" pitchFamily="34" charset="-122"/>
+                <a:cs typeface="Times New Roman" pitchFamily="34" charset="-120"/>
+              </a:rPr>
+              <a:t>Example: phone (China), rice (Thailand), car (Japan), clothes (Turkey or China), medicine (France or India).</a:t>
+            </a:r>
+            <a:endParaRPr lang="en-US" sz="4000" dirty="0"/>
+          </a:p>
+        </p:txBody>
+      </p:sp>
+      <p:sp>
+        <p:nvSpPr>
+          <p:cNvPr id="25" name="Slide Number Placeholder 0"/>
+          <p:cNvSpPr>
+            <a:spLocks noGrp="1"/>
+          </p:cNvSpPr>
+          <p:nvPr>
+            <p:ph type="sldNum" sz="quarter" idx="4294967295"/>
+          </p:nvPr>
+        </p:nvSpPr>
+        <p:spPr>
+          <a:xfrm>
+            <a:off x="27432" y="91440"/>
+            <a:ext cx="585216" cy="475488"/>
+          </a:xfrm>
+          <a:prstGeom prst="rect">
+            <a:avLst/>
+          </a:prstGeom>
+          <a:extLst>
+            <a:ext uri="{C572A759-6A51-4108-AA02-DFA0A04FC94B}">
+              <ma14:wrappingTextBoxFlag xmlns:ma14="http://schemas.microsoft.com/office/mac/drawingml/2011/main" val="0"/>
+            </a:ext>
+          </a:extLst>
+        </p:spPr>
+        <p:txBody>
+          <a:bodyPr/>
+          <a:lstStyle>
+            <a:lvl1pPr>
+              <a:defRPr sz="2000">
+                <a:solidFill>
+                  <a:srgbClr val="FFFFFF"/>
+                </a:solidFill>
+                <a:latin typeface="Calibri"/>
+                <a:ea typeface="Calibri"/>
+                <a:cs typeface="Calibri"/>
+              </a:defRPr>
+            </a:lvl1pPr>
+          </a:lstStyle>
+          <a:p>
+            <a:pPr algn="ctr"/>
+            <a:fld id="{F7021451-1387-4CA6-816F-3879F97B5CBC}" type="slidenum">
+              <a:rPr b="1" lang="en-US"/>
+              <a:t>5</a:t>
+            </a:fld>
+            <a:endParaRPr lang="en-US"/>
+          </a:p>
+        </p:txBody>
+      </p:sp>
+    </p:spTree>
+  </p:cSld>
+  <p:clrMapOvr>
+    <a:masterClrMapping/>
+  </p:clrMapOvr>
+</p:sld>
+</file>
+
+<file path=ppt/slides/slide50.xml><?xml version="1.0" encoding="utf-8"?>
+<p:sld xmlns:a="http://schemas.openxmlformats.org/drawingml/2006/main" xmlns:r="http://schemas.openxmlformats.org/officeDocument/2006/relationships" xmlns:p="http://schemas.openxmlformats.org/presentationml/2006/main">
+  <p:cSld name="Slide 50">
+    <p:spTree>
+      <p:nvGrpSpPr>
+        <p:cNvPr id="1" name=""/>
+        <p:cNvGrpSpPr/>
+        <p:nvPr/>
+      </p:nvGrpSpPr>
+      <p:grpSpPr>
+        <a:xfrm>
+          <a:off x="0" y="0"/>
+          <a:ext cx="0" cy="0"/>
+          <a:chOff x="0" y="0"/>
+          <a:chExt cx="0" cy="0"/>
+        </a:xfrm>
+      </p:grpSpPr>
+      <p:sp>
+        <p:nvSpPr>
+          <p:cNvPr id="2" name="Text 0"/>
+          <p:cNvSpPr/>
+          <p:nvPr/>
+        </p:nvSpPr>
+        <p:spPr>
+          <a:xfrm>
+            <a:off x="457200" y="713232"/>
+            <a:ext cx="11368735" cy="274320"/>
+          </a:xfrm>
+          <a:prstGeom prst="rect">
+            <a:avLst/>
+          </a:prstGeom>
+          <a:noFill/>
+          <a:ln/>
+        </p:spPr>
+        <p:txBody>
+          <a:bodyPr wrap="square" lIns="0" tIns="0" rIns="0" bIns="0" rtlCol="0" anchor="ctr"/>
+          <a:lstStyle/>
+          <a:p>
+            <a:pPr algn="r" indent="0" marL="0">
+              <a:buNone/>
+            </a:pPr>
+            <a:r>
+              <a:rPr lang="en-US" sz="1400" b="1" dirty="0">
+                <a:solidFill>
+                  <a:srgbClr val="1C3F6E"/>
+                </a:solidFill>
+                <a:latin typeface="Calibri" pitchFamily="34" charset="0"/>
+                <a:ea typeface="Calibri" pitchFamily="34" charset="-122"/>
+                <a:cs typeface="Calibri" pitchFamily="34" charset="-120"/>
+              </a:rPr>
               <a:t>BILINGUAL GAME</a:t>
             </a:r>
             <a:endParaRPr lang="en-US" sz="1400" dirty="0"/>
@@ -17110,7 +18229,7 @@
       </p:sp>
       <p:graphicFrame>
         <p:nvGraphicFramePr>
-          <p:cNvPr id="49" name="Table 0"/>
+          <p:cNvPr id="51" name="Table 0"/>
           <p:cNvGraphicFramePr>
             <a:graphicFrameLocks noGrp="1"/>
           </p:cNvGraphicFramePr>
@@ -18146,7 +19265,7 @@
             <a:pPr algn="ctr"/>
             <a:fld id="{F7021451-1387-4CA6-816F-3879F97B5CBC}" type="slidenum">
               <a:rPr b="1" lang="en-US"/>
-              <a:t>48</a:t>
+              <a:t>50</a:t>
             </a:fld>
             <a:endParaRPr lang="en-US"/>
           </a:p>
@@ -18160,9 +19279,9 @@
 </p:sld>
 </file>
 
-<file path=ppt/slides/slide49.xml><?xml version="1.0" encoding="utf-8"?>
+<file path=ppt/slides/slide51.xml><?xml version="1.0" encoding="utf-8"?>
 <p:sld xmlns:a="http://schemas.openxmlformats.org/drawingml/2006/main" xmlns:r="http://schemas.openxmlformats.org/officeDocument/2006/relationships" xmlns:p="http://schemas.openxmlformats.org/presentationml/2006/main">
-  <p:cSld name="Slide 49">
+  <p:cSld name="Slide 51">
     <p:spTree>
       <p:nvGrpSpPr>
         <p:cNvPr id="1" name=""/>
@@ -18257,7 +19376,7 @@
       </p:sp>
       <p:graphicFrame>
         <p:nvGraphicFramePr>
-          <p:cNvPr id="50" name="Table 0"/>
+          <p:cNvPr id="52" name="Table 0"/>
           <p:cNvGraphicFramePr>
             <a:graphicFrameLocks noGrp="1"/>
           </p:cNvGraphicFramePr>
@@ -18879,7 +19998,7 @@
             <a:pPr algn="ctr"/>
             <a:fld id="{F7021451-1387-4CA6-816F-3879F97B5CBC}" type="slidenum">
               <a:rPr b="1" lang="en-US"/>
-              <a:t>49</a:t>
+              <a:t>51</a:t>
             </a:fld>
             <a:endParaRPr lang="en-US"/>
           </a:p>
@@ -18893,9 +20012,9 @@
 </p:sld>
 </file>
 
-<file path=ppt/slides/slide5.xml><?xml version="1.0" encoding="utf-8"?>
+<file path=ppt/slides/slide52.xml><?xml version="1.0" encoding="utf-8"?>
 <p:sld xmlns:a="http://schemas.openxmlformats.org/drawingml/2006/main" xmlns:r="http://schemas.openxmlformats.org/officeDocument/2006/relationships" xmlns:p="http://schemas.openxmlformats.org/presentationml/2006/main">
-  <p:cSld name="Slide 5">
+  <p:cSld name="Slide 52">
     <p:spTree>
       <p:nvGrpSpPr>
         <p:cNvPr id="1" name=""/>
@@ -18943,225 +20062,6 @@
                 <a:ea typeface="Calibri" pitchFamily="34" charset="-122"/>
                 <a:cs typeface="Calibri" pitchFamily="34" charset="-120"/>
               </a:rPr>
-              <a:t>HOMEWORK CORRECTION</a:t>
-            </a:r>
-            <a:endParaRPr lang="en-US" sz="1400" dirty="0"/>
-          </a:p>
-        </p:txBody>
-      </p:sp>
-      <p:pic>
-        <p:nvPicPr>
-          <p:cNvPr id="3" name="Image 0" descr="/home/claude/f4/img/minesec_sheet.png">    </p:cNvPr>
-          <p:cNvPicPr>
-            <a:picLocks noChangeAspect="1"/>
-          </p:cNvPicPr>
-          <p:nvPr/>
-        </p:nvPicPr>
-        <p:blipFill>
-          <a:blip r:embed="rId1"/>
-          <a:stretch>
-            <a:fillRect/>
-          </a:stretch>
-        </p:blipFill>
-        <p:spPr>
-          <a:xfrm>
-            <a:off x="0" y="658368"/>
-            <a:ext cx="5120640" cy="5833872"/>
-          </a:xfrm>
-          <a:prstGeom prst="rect">
-            <a:avLst/>
-          </a:prstGeom>
-        </p:spPr>
-      </p:pic>
-      <p:sp>
-        <p:nvSpPr>
-          <p:cNvPr id="4" name="Text 1"/>
-          <p:cNvSpPr/>
-          <p:nvPr/>
-        </p:nvSpPr>
-        <p:spPr>
-          <a:xfrm>
-            <a:off x="5349240" y="1005840"/>
-            <a:ext cx="6522415" cy="731520"/>
-          </a:xfrm>
-          <a:prstGeom prst="rect">
-            <a:avLst/>
-          </a:prstGeom>
-          <a:noFill/>
-          <a:ln/>
-        </p:spPr>
-        <p:txBody>
-          <a:bodyPr wrap="square" lIns="0" tIns="0" rIns="0" bIns="0" rtlCol="0" anchor="ctr">
-            <a:normAutofit/>
-          </a:bodyPr>
-          <a:lstStyle/>
-          <a:p>
-            <a:pPr algn="ctr" indent="0" marL="0">
-              <a:buNone/>
-            </a:pPr>
-            <a:r>
-              <a:rPr lang="en-US" sz="3600" b="1" dirty="0">
-                <a:solidFill>
-                  <a:srgbClr val="990011"/>
-                </a:solidFill>
-                <a:latin typeface="Times New Roman" pitchFamily="34" charset="0"/>
-                <a:ea typeface="Times New Roman" pitchFamily="34" charset="-122"/>
-                <a:cs typeface="Times New Roman" pitchFamily="34" charset="-120"/>
-              </a:rPr>
-              <a:t>Correction: Possible Answer</a:t>
-            </a:r>
-            <a:endParaRPr lang="en-US" sz="3600" dirty="0"/>
-          </a:p>
-        </p:txBody>
-      </p:sp>
-      <p:sp>
-        <p:nvSpPr>
-          <p:cNvPr id="5" name="Text 2"/>
-          <p:cNvSpPr/>
-          <p:nvPr/>
-        </p:nvSpPr>
-        <p:spPr>
-          <a:xfrm>
-            <a:off x="5349240" y="1783080"/>
-            <a:ext cx="6522415" cy="4663440"/>
-          </a:xfrm>
-          <a:prstGeom prst="rect">
-            <a:avLst/>
-          </a:prstGeom>
-          <a:noFill/>
-          <a:ln/>
-        </p:spPr>
-        <p:txBody>
-          <a:bodyPr wrap="square" lIns="0" tIns="0" rIns="0" bIns="0" rtlCol="0" anchor="t"/>
-          <a:lstStyle/>
-          <a:p>
-            <a:pPr algn="l" indent="0" marL="0">
-              <a:spcAft>
-                <a:spcPts val="800"/>
-              </a:spcAft>
-              <a:buNone/>
-            </a:pPr>
-            <a:r>
-              <a:rPr lang="en-US" sz="4000" dirty="0">
-                <a:solidFill>
-                  <a:srgbClr val="111111"/>
-                </a:solidFill>
-                <a:latin typeface="Times New Roman" pitchFamily="34" charset="0"/>
-                <a:ea typeface="Times New Roman" pitchFamily="34" charset="-122"/>
-                <a:cs typeface="Times New Roman" pitchFamily="34" charset="-120"/>
-              </a:rPr>
-              <a:t>Example: phone (China), rice (Thailand), car (Japan), clothes (Turkey or China), medicine (France or India).</a:t>
-            </a:r>
-            <a:endParaRPr lang="en-US" sz="4000" dirty="0"/>
-          </a:p>
-        </p:txBody>
-      </p:sp>
-      <p:sp>
-        <p:nvSpPr>
-          <p:cNvPr id="25" name="Slide Number Placeholder 0"/>
-          <p:cNvSpPr>
-            <a:spLocks noGrp="1"/>
-          </p:cNvSpPr>
-          <p:nvPr>
-            <p:ph type="sldNum" sz="quarter" idx="4294967295"/>
-          </p:nvPr>
-        </p:nvSpPr>
-        <p:spPr>
-          <a:xfrm>
-            <a:off x="27432" y="91440"/>
-            <a:ext cx="585216" cy="475488"/>
-          </a:xfrm>
-          <a:prstGeom prst="rect">
-            <a:avLst/>
-          </a:prstGeom>
-          <a:extLst>
-            <a:ext uri="{C572A759-6A51-4108-AA02-DFA0A04FC94B}">
-              <ma14:wrappingTextBoxFlag xmlns:ma14="http://schemas.microsoft.com/office/mac/drawingml/2011/main" val="0"/>
-            </a:ext>
-          </a:extLst>
-        </p:spPr>
-        <p:txBody>
-          <a:bodyPr/>
-          <a:lstStyle>
-            <a:lvl1pPr>
-              <a:defRPr sz="2000">
-                <a:solidFill>
-                  <a:srgbClr val="FFFFFF"/>
-                </a:solidFill>
-                <a:latin typeface="Calibri"/>
-                <a:ea typeface="Calibri"/>
-                <a:cs typeface="Calibri"/>
-              </a:defRPr>
-            </a:lvl1pPr>
-          </a:lstStyle>
-          <a:p>
-            <a:pPr algn="ctr"/>
-            <a:fld id="{F7021451-1387-4CA6-816F-3879F97B5CBC}" type="slidenum">
-              <a:rPr b="1" lang="en-US"/>
-              <a:t>5</a:t>
-            </a:fld>
-            <a:endParaRPr lang="en-US"/>
-          </a:p>
-        </p:txBody>
-      </p:sp>
-    </p:spTree>
-  </p:cSld>
-  <p:clrMapOvr>
-    <a:masterClrMapping/>
-  </p:clrMapOvr>
-</p:sld>
-</file>
-
-<file path=ppt/slides/slide50.xml><?xml version="1.0" encoding="utf-8"?>
-<p:sld xmlns:a="http://schemas.openxmlformats.org/drawingml/2006/main" xmlns:r="http://schemas.openxmlformats.org/officeDocument/2006/relationships" xmlns:p="http://schemas.openxmlformats.org/presentationml/2006/main">
-  <p:cSld name="Slide 50">
-    <p:spTree>
-      <p:nvGrpSpPr>
-        <p:cNvPr id="1" name=""/>
-        <p:cNvGrpSpPr/>
-        <p:nvPr/>
-      </p:nvGrpSpPr>
-      <p:grpSpPr>
-        <a:xfrm>
-          <a:off x="0" y="0"/>
-          <a:ext cx="0" cy="0"/>
-          <a:chOff x="0" y="0"/>
-          <a:chExt cx="0" cy="0"/>
-        </a:xfrm>
-      </p:grpSpPr>
-      <p:sp>
-        <p:nvSpPr>
-          <p:cNvPr id="2" name="Text 0"/>
-          <p:cNvSpPr/>
-          <p:nvPr/>
-        </p:nvSpPr>
-        <p:spPr>
-          <a:xfrm>
-            <a:off x="457200" y="713232"/>
-            <a:ext cx="11368735" cy="274320"/>
-          </a:xfrm>
-          <a:prstGeom prst="rect">
-            <a:avLst/>
-          </a:prstGeom>
-          <a:noFill/>
-          <a:ln/>
-        </p:spPr>
-        <p:txBody>
-          <a:bodyPr wrap="square" lIns="0" tIns="0" rIns="0" bIns="0" rtlCol="0" anchor="ctr"/>
-          <a:lstStyle/>
-          <a:p>
-            <a:pPr algn="r" indent="0" marL="0">
-              <a:buNone/>
-            </a:pPr>
-            <a:r>
-              <a:rPr lang="en-US" sz="1400" b="1" dirty="0">
-                <a:solidFill>
-                  <a:srgbClr val="1C3F6E"/>
-                </a:solidFill>
-                <a:latin typeface="Calibri" pitchFamily="34" charset="0"/>
-                <a:ea typeface="Calibri" pitchFamily="34" charset="-122"/>
-                <a:cs typeface="Calibri" pitchFamily="34" charset="-120"/>
-              </a:rPr>
               <a:t>LOGBOOK</a:t>
             </a:r>
             <a:endParaRPr lang="en-US" sz="1400" dirty="0"/>
@@ -19209,7 +20109,7 @@
       </p:sp>
       <p:graphicFrame>
         <p:nvGraphicFramePr>
-          <p:cNvPr id="51" name="Table 0"/>
+          <p:cNvPr id="53" name="Table 0"/>
           <p:cNvGraphicFramePr>
             <a:graphicFrameLocks noGrp="1"/>
           </p:cNvGraphicFramePr>
@@ -19319,7 +20219,7 @@
                           <a:ea typeface="Calibri" pitchFamily="34" charset="-122"/>
                           <a:cs typeface="Calibri" pitchFamily="34" charset="-120"/>
                         </a:rPr>
-                        <a:t>Types of Telecommunication Networks; Nature and Uses of the Internet; Advantages, Disadvantages and Socio-economic Impacts.</a:t>
+                        <a:t>Types of Telecommunication Networks; Nature and Uses of the Internet; Advantages; Disadvantages.</a:t>
                       </a:r>
                       <a:endParaRPr lang="en-US" sz="1600" dirty="0">
                         <a:latin typeface="Calibri" charset="0"/>
@@ -19969,656 +20869,6 @@
             <a:pPr algn="ctr"/>
             <a:fld id="{F7021451-1387-4CA6-816F-3879F97B5CBC}" type="slidenum">
               <a:rPr b="1" lang="en-US"/>
-              <a:t>50</a:t>
-            </a:fld>
-            <a:endParaRPr lang="en-US"/>
-          </a:p>
-        </p:txBody>
-      </p:sp>
-    </p:spTree>
-  </p:cSld>
-  <p:clrMapOvr>
-    <a:masterClrMapping/>
-  </p:clrMapOvr>
-</p:sld>
-</file>
-
-<file path=ppt/slides/slide51.xml><?xml version="1.0" encoding="utf-8"?>
-<p:sld xmlns:a="http://schemas.openxmlformats.org/drawingml/2006/main" xmlns:r="http://schemas.openxmlformats.org/officeDocument/2006/relationships" xmlns:p="http://schemas.openxmlformats.org/presentationml/2006/main">
-  <p:cSld name="Slide 51">
-    <p:spTree>
-      <p:nvGrpSpPr>
-        <p:cNvPr id="1" name=""/>
-        <p:cNvGrpSpPr/>
-        <p:nvPr/>
-      </p:nvGrpSpPr>
-      <p:grpSpPr>
-        <a:xfrm>
-          <a:off x="0" y="0"/>
-          <a:ext cx="0" cy="0"/>
-          <a:chOff x="0" y="0"/>
-          <a:chExt cx="0" cy="0"/>
-        </a:xfrm>
-      </p:grpSpPr>
-      <p:sp>
-        <p:nvSpPr>
-          <p:cNvPr id="2" name="Text 0"/>
-          <p:cNvSpPr/>
-          <p:nvPr/>
-        </p:nvSpPr>
-        <p:spPr>
-          <a:xfrm>
-            <a:off x="457200" y="713232"/>
-            <a:ext cx="11368735" cy="274320"/>
-          </a:xfrm>
-          <a:prstGeom prst="rect">
-            <a:avLst/>
-          </a:prstGeom>
-          <a:noFill/>
-          <a:ln/>
-        </p:spPr>
-        <p:txBody>
-          <a:bodyPr wrap="square" lIns="0" tIns="0" rIns="0" bIns="0" rtlCol="0" anchor="ctr"/>
-          <a:lstStyle/>
-          <a:p>
-            <a:pPr algn="r" indent="0" marL="0">
-              <a:buNone/>
-            </a:pPr>
-            <a:r>
-              <a:rPr lang="en-US" sz="1400" b="1" dirty="0">
-                <a:solidFill>
-                  <a:srgbClr val="1C3F6E"/>
-                </a:solidFill>
-                <a:latin typeface="Calibri" pitchFamily="34" charset="0"/>
-                <a:ea typeface="Calibri" pitchFamily="34" charset="-122"/>
-                <a:cs typeface="Calibri" pitchFamily="34" charset="-120"/>
-              </a:rPr>
-              <a:t>TEACHER'S NOTE</a:t>
-            </a:r>
-            <a:endParaRPr lang="en-US" sz="1400" dirty="0"/>
-          </a:p>
-        </p:txBody>
-      </p:sp>
-      <p:pic>
-        <p:nvPicPr>
-          <p:cNvPr id="3" name="Image 0" descr="/home/claude/f4/img/minesec_sheet.png">    </p:cNvPr>
-          <p:cNvPicPr>
-            <a:picLocks noChangeAspect="1"/>
-          </p:cNvPicPr>
-          <p:nvPr/>
-        </p:nvPicPr>
-        <p:blipFill>
-          <a:blip r:embed="rId1"/>
-          <a:stretch>
-            <a:fillRect/>
-          </a:stretch>
-        </p:blipFill>
-        <p:spPr>
-          <a:xfrm>
-            <a:off x="0" y="658368"/>
-            <a:ext cx="5120640" cy="5833872"/>
-          </a:xfrm>
-          <a:prstGeom prst="rect">
-            <a:avLst/>
-          </a:prstGeom>
-        </p:spPr>
-      </p:pic>
-      <p:sp>
-        <p:nvSpPr>
-          <p:cNvPr id="4" name="Text 1"/>
-          <p:cNvSpPr/>
-          <p:nvPr/>
-        </p:nvSpPr>
-        <p:spPr>
-          <a:xfrm>
-            <a:off x="5349240" y="1005840"/>
-            <a:ext cx="6522415" cy="731520"/>
-          </a:xfrm>
-          <a:prstGeom prst="rect">
-            <a:avLst/>
-          </a:prstGeom>
-          <a:noFill/>
-          <a:ln/>
-        </p:spPr>
-        <p:txBody>
-          <a:bodyPr wrap="square" lIns="0" tIns="0" rIns="0" bIns="0" rtlCol="0" anchor="ctr">
-            <a:normAutofit/>
-          </a:bodyPr>
-          <a:lstStyle/>
-          <a:p>
-            <a:pPr algn="ctr" indent="0" marL="0">
-              <a:buNone/>
-            </a:pPr>
-            <a:r>
-              <a:rPr lang="en-US" sz="3600" b="1" dirty="0">
-                <a:solidFill>
-                  <a:srgbClr val="990011"/>
-                </a:solidFill>
-                <a:latin typeface="Times New Roman" pitchFamily="34" charset="0"/>
-                <a:ea typeface="Times New Roman" pitchFamily="34" charset="-122"/>
-                <a:cs typeface="Times New Roman" pitchFamily="34" charset="-120"/>
-              </a:rPr>
-              <a:t>Teacher's Note</a:t>
-            </a:r>
-            <a:endParaRPr lang="en-US" sz="3600" dirty="0"/>
-          </a:p>
-        </p:txBody>
-      </p:sp>
-      <p:sp>
-        <p:nvSpPr>
-          <p:cNvPr id="5" name="Text 2"/>
-          <p:cNvSpPr/>
-          <p:nvPr/>
-        </p:nvSpPr>
-        <p:spPr>
-          <a:xfrm>
-            <a:off x="5349240" y="1783080"/>
-            <a:ext cx="6522415" cy="4663440"/>
-          </a:xfrm>
-          <a:prstGeom prst="rect">
-            <a:avLst/>
-          </a:prstGeom>
-          <a:noFill/>
-          <a:ln/>
-        </p:spPr>
-        <p:txBody>
-          <a:bodyPr wrap="square" lIns="0" tIns="0" rIns="0" bIns="0" rtlCol="0" anchor="t"/>
-          <a:lstStyle/>
-          <a:p>
-            <a:pPr algn="l" marL="342900" indent="-342900">
-              <a:spcAft>
-                <a:spcPts val="800"/>
-              </a:spcAft>
-              <a:buSzPct val="100000"/>
-              <a:buChar char="•"/>
-            </a:pPr>
-            <a:r>
-              <a:rPr lang="en-US" sz="2000" dirty="0">
-                <a:solidFill>
-                  <a:srgbClr val="111111"/>
-                </a:solidFill>
-                <a:latin typeface="Calibri" pitchFamily="34" charset="0"/>
-                <a:ea typeface="Calibri" pitchFamily="34" charset="-122"/>
-                <a:cs typeface="Calibri" pitchFamily="34" charset="-120"/>
-              </a:rPr>
-              <a:t>Timing: Homework correction, plan, objectives 8 min | Recall, situation, action 10 min | 5 activities 30 min | Board summary (copying) 30 min | Evaluation, remediation 10 min | Homework, next lesson 5 min | Logbook 7 min</a:t>
-            </a:r>
-            <a:endParaRPr lang="en-US" sz="2000" dirty="0"/>
-          </a:p>
-          <a:p>
-            <a:pPr algn="l" marL="342900" indent="-342900">
-              <a:spcAft>
-                <a:spcPts val="800"/>
-              </a:spcAft>
-              <a:buSzPct val="100000"/>
-              <a:buChar char="•"/>
-            </a:pPr>
-            <a:r>
-              <a:rPr lang="en-US" sz="2000" dirty="0">
-                <a:solidFill>
-                  <a:srgbClr val="111111"/>
-                </a:solidFill>
-                <a:latin typeface="Calibri" pitchFamily="34" charset="0"/>
-                <a:ea typeface="Calibri" pitchFamily="34" charset="-122"/>
-                <a:cs typeface="Calibri" pitchFamily="34" charset="-120"/>
-              </a:rPr>
-              <a:t>Without the projector (Activity 1): list.</a:t>
-            </a:r>
-            <a:endParaRPr lang="en-US" sz="2000" dirty="0"/>
-          </a:p>
-          <a:p>
-            <a:pPr algn="l" marL="342900" indent="-342900">
-              <a:spcAft>
-                <a:spcPts val="800"/>
-              </a:spcAft>
-              <a:buSzPct val="100000"/>
-              <a:buChar char="•"/>
-            </a:pPr>
-            <a:r>
-              <a:rPr lang="en-US" sz="2000" dirty="0">
-                <a:solidFill>
-                  <a:srgbClr val="111111"/>
-                </a:solidFill>
-                <a:latin typeface="Calibri" pitchFamily="34" charset="0"/>
-                <a:ea typeface="Calibri" pitchFamily="34" charset="-122"/>
-                <a:cs typeface="Calibri" pitchFamily="34" charset="-120"/>
-              </a:rPr>
-              <a:t>Without the projector (Activity 2): discuss.</a:t>
-            </a:r>
-            <a:endParaRPr lang="en-US" sz="2000" dirty="0"/>
-          </a:p>
-          <a:p>
-            <a:pPr algn="l" marL="342900" indent="-342900">
-              <a:spcAft>
-                <a:spcPts val="800"/>
-              </a:spcAft>
-              <a:buSzPct val="100000"/>
-              <a:buChar char="•"/>
-            </a:pPr>
-            <a:r>
-              <a:rPr lang="en-US" sz="2000" dirty="0">
-                <a:solidFill>
-                  <a:srgbClr val="111111"/>
-                </a:solidFill>
-                <a:latin typeface="Calibri" pitchFamily="34" charset="0"/>
-                <a:ea typeface="Calibri" pitchFamily="34" charset="-122"/>
-                <a:cs typeface="Calibri" pitchFamily="34" charset="-120"/>
-              </a:rPr>
-              <a:t>Without the projector (Activity 3): list.</a:t>
-            </a:r>
-            <a:endParaRPr lang="en-US" sz="2000" dirty="0"/>
-          </a:p>
-          <a:p>
-            <a:pPr algn="l" marL="342900" indent="-342900">
-              <a:spcAft>
-                <a:spcPts val="800"/>
-              </a:spcAft>
-              <a:buSzPct val="100000"/>
-              <a:buChar char="•"/>
-            </a:pPr>
-            <a:r>
-              <a:rPr lang="en-US" sz="2000" dirty="0">
-                <a:solidFill>
-                  <a:srgbClr val="111111"/>
-                </a:solidFill>
-                <a:latin typeface="Calibri" pitchFamily="34" charset="0"/>
-                <a:ea typeface="Calibri" pitchFamily="34" charset="-122"/>
-                <a:cs typeface="Calibri" pitchFamily="34" charset="-120"/>
-              </a:rPr>
-              <a:t>Without the projector (Activity 4): discuss.</a:t>
-            </a:r>
-            <a:endParaRPr lang="en-US" sz="2000" dirty="0"/>
-          </a:p>
-          <a:p>
-            <a:pPr algn="l" marL="342900" indent="-342900">
-              <a:spcAft>
-                <a:spcPts val="800"/>
-              </a:spcAft>
-              <a:buSzPct val="100000"/>
-              <a:buChar char="•"/>
-            </a:pPr>
-            <a:r>
-              <a:rPr lang="en-US" sz="2000" dirty="0">
-                <a:solidFill>
-                  <a:srgbClr val="111111"/>
-                </a:solidFill>
-                <a:latin typeface="Calibri" pitchFamily="34" charset="0"/>
-                <a:ea typeface="Calibri" pitchFamily="34" charset="-122"/>
-                <a:cs typeface="Calibri" pitchFamily="34" charset="-120"/>
-              </a:rPr>
-              <a:t>Without the projector (Activity 5): discuss.</a:t>
-            </a:r>
-            <a:endParaRPr lang="en-US" sz="2000" dirty="0"/>
-          </a:p>
-        </p:txBody>
-      </p:sp>
-      <p:sp>
-        <p:nvSpPr>
-          <p:cNvPr id="25" name="Slide Number Placeholder 0"/>
-          <p:cNvSpPr>
-            <a:spLocks noGrp="1"/>
-          </p:cNvSpPr>
-          <p:nvPr>
-            <p:ph type="sldNum" sz="quarter" idx="4294967295"/>
-          </p:nvPr>
-        </p:nvSpPr>
-        <p:spPr>
-          <a:xfrm>
-            <a:off x="27432" y="91440"/>
-            <a:ext cx="585216" cy="475488"/>
-          </a:xfrm>
-          <a:prstGeom prst="rect">
-            <a:avLst/>
-          </a:prstGeom>
-          <a:extLst>
-            <a:ext uri="{C572A759-6A51-4108-AA02-DFA0A04FC94B}">
-              <ma14:wrappingTextBoxFlag xmlns:ma14="http://schemas.microsoft.com/office/mac/drawingml/2011/main" val="0"/>
-            </a:ext>
-          </a:extLst>
-        </p:spPr>
-        <p:txBody>
-          <a:bodyPr/>
-          <a:lstStyle>
-            <a:lvl1pPr>
-              <a:defRPr sz="2000">
-                <a:solidFill>
-                  <a:srgbClr val="FFFFFF"/>
-                </a:solidFill>
-                <a:latin typeface="Calibri"/>
-                <a:ea typeface="Calibri"/>
-                <a:cs typeface="Calibri"/>
-              </a:defRPr>
-            </a:lvl1pPr>
-          </a:lstStyle>
-          <a:p>
-            <a:pPr algn="ctr"/>
-            <a:fld id="{F7021451-1387-4CA6-816F-3879F97B5CBC}" type="slidenum">
-              <a:rPr b="1" lang="en-US"/>
-              <a:t>51</a:t>
-            </a:fld>
-            <a:endParaRPr lang="en-US"/>
-          </a:p>
-        </p:txBody>
-      </p:sp>
-    </p:spTree>
-  </p:cSld>
-  <p:clrMapOvr>
-    <a:masterClrMapping/>
-  </p:clrMapOvr>
-</p:sld>
-</file>
-
-<file path=ppt/slides/slide52.xml><?xml version="1.0" encoding="utf-8"?>
-<p:sld xmlns:a="http://schemas.openxmlformats.org/drawingml/2006/main" xmlns:r="http://schemas.openxmlformats.org/officeDocument/2006/relationships" xmlns:p="http://schemas.openxmlformats.org/presentationml/2006/main">
-  <p:cSld name="Slide 52">
-    <p:spTree>
-      <p:nvGrpSpPr>
-        <p:cNvPr id="1" name=""/>
-        <p:cNvGrpSpPr/>
-        <p:nvPr/>
-      </p:nvGrpSpPr>
-      <p:grpSpPr>
-        <a:xfrm>
-          <a:off x="0" y="0"/>
-          <a:ext cx="0" cy="0"/>
-          <a:chOff x="0" y="0"/>
-          <a:chExt cx="0" cy="0"/>
-        </a:xfrm>
-      </p:grpSpPr>
-      <p:sp>
-        <p:nvSpPr>
-          <p:cNvPr id="2" name="Text 0"/>
-          <p:cNvSpPr/>
-          <p:nvPr/>
-        </p:nvSpPr>
-        <p:spPr>
-          <a:xfrm>
-            <a:off x="457200" y="713232"/>
-            <a:ext cx="11368735" cy="274320"/>
-          </a:xfrm>
-          <a:prstGeom prst="rect">
-            <a:avLst/>
-          </a:prstGeom>
-          <a:noFill/>
-          <a:ln/>
-        </p:spPr>
-        <p:txBody>
-          <a:bodyPr wrap="square" lIns="0" tIns="0" rIns="0" bIns="0" rtlCol="0" anchor="ctr"/>
-          <a:lstStyle/>
-          <a:p>
-            <a:pPr algn="r" indent="0" marL="0">
-              <a:buNone/>
-            </a:pPr>
-            <a:r>
-              <a:rPr lang="en-US" sz="1400" b="1" dirty="0">
-                <a:solidFill>
-                  <a:srgbClr val="1C3F6E"/>
-                </a:solidFill>
-                <a:latin typeface="Calibri" pitchFamily="34" charset="0"/>
-                <a:ea typeface="Calibri" pitchFamily="34" charset="-122"/>
-                <a:cs typeface="Calibri" pitchFamily="34" charset="-120"/>
-              </a:rPr>
-              <a:t>REFERENCES</a:t>
-            </a:r>
-            <a:endParaRPr lang="en-US" sz="1400" dirty="0"/>
-          </a:p>
-        </p:txBody>
-      </p:sp>
-      <p:pic>
-        <p:nvPicPr>
-          <p:cNvPr id="3" name="Image 0" descr="/home/claude/f4/img/minesec_sheet.png">    </p:cNvPr>
-          <p:cNvPicPr>
-            <a:picLocks noChangeAspect="1"/>
-          </p:cNvPicPr>
-          <p:nvPr/>
-        </p:nvPicPr>
-        <p:blipFill>
-          <a:blip r:embed="rId1"/>
-          <a:stretch>
-            <a:fillRect/>
-          </a:stretch>
-        </p:blipFill>
-        <p:spPr>
-          <a:xfrm>
-            <a:off x="0" y="658368"/>
-            <a:ext cx="1463040" cy="5833872"/>
-          </a:xfrm>
-          <a:prstGeom prst="rect">
-            <a:avLst/>
-          </a:prstGeom>
-        </p:spPr>
-      </p:pic>
-      <p:sp>
-        <p:nvSpPr>
-          <p:cNvPr id="4" name="Text 1"/>
-          <p:cNvSpPr/>
-          <p:nvPr/>
-        </p:nvSpPr>
-        <p:spPr>
-          <a:xfrm>
-            <a:off x="1691640" y="1005840"/>
-            <a:ext cx="10180015" cy="731520"/>
-          </a:xfrm>
-          <a:prstGeom prst="rect">
-            <a:avLst/>
-          </a:prstGeom>
-          <a:noFill/>
-          <a:ln/>
-        </p:spPr>
-        <p:txBody>
-          <a:bodyPr wrap="square" lIns="0" tIns="0" rIns="0" bIns="0" rtlCol="0" anchor="ctr">
-            <a:normAutofit/>
-          </a:bodyPr>
-          <a:lstStyle/>
-          <a:p>
-            <a:pPr algn="ctr" indent="0" marL="0">
-              <a:buNone/>
-            </a:pPr>
-            <a:r>
-              <a:rPr lang="en-US" sz="3600" b="1" dirty="0">
-                <a:solidFill>
-                  <a:srgbClr val="990011"/>
-                </a:solidFill>
-                <a:latin typeface="Times New Roman" pitchFamily="34" charset="0"/>
-                <a:ea typeface="Times New Roman" pitchFamily="34" charset="-122"/>
-                <a:cs typeface="Times New Roman" pitchFamily="34" charset="-120"/>
-              </a:rPr>
-              <a:t>References</a:t>
-            </a:r>
-            <a:endParaRPr lang="en-US" sz="3600" dirty="0"/>
-          </a:p>
-        </p:txBody>
-      </p:sp>
-      <p:sp>
-        <p:nvSpPr>
-          <p:cNvPr id="5" name="Text 2"/>
-          <p:cNvSpPr/>
-          <p:nvPr/>
-        </p:nvSpPr>
-        <p:spPr>
-          <a:xfrm>
-            <a:off x="1691640" y="1783080"/>
-            <a:ext cx="10180015" cy="4663440"/>
-          </a:xfrm>
-          <a:prstGeom prst="rect">
-            <a:avLst/>
-          </a:prstGeom>
-          <a:noFill/>
-          <a:ln/>
-        </p:spPr>
-        <p:txBody>
-          <a:bodyPr wrap="square" lIns="0" tIns="0" rIns="0" bIns="0" rtlCol="0" anchor="t"/>
-          <a:lstStyle/>
-          <a:p>
-            <a:pPr algn="l" marL="342900" indent="-342900">
-              <a:spcAft>
-                <a:spcPts val="800"/>
-              </a:spcAft>
-              <a:buSzPct val="100000"/>
-              <a:buChar char="•"/>
-            </a:pPr>
-            <a:r>
-              <a:rPr lang="en-US" sz="1800" dirty="0">
-                <a:solidFill>
-                  <a:srgbClr val="111111"/>
-                </a:solidFill>
-                <a:latin typeface="Calibri" pitchFamily="34" charset="0"/>
-                <a:ea typeface="Calibri" pitchFamily="34" charset="-122"/>
-                <a:cs typeface="Calibri" pitchFamily="34" charset="-120"/>
-              </a:rPr>
-              <a:t>Geography Syllabus, Forms I–V, MINESEC (2023) — Form 5, Module I: Management of Manufacturing and Tertiary Activities.</a:t>
-            </a:r>
-            <a:endParaRPr lang="en-US" sz="1800" dirty="0"/>
-          </a:p>
-          <a:p>
-            <a:pPr algn="l" marL="342900" indent="-342900">
-              <a:spcAft>
-                <a:spcPts val="800"/>
-              </a:spcAft>
-              <a:buSzPct val="100000"/>
-              <a:buChar char="•"/>
-            </a:pPr>
-            <a:r>
-              <a:rPr lang="en-US" sz="1800" dirty="0">
-                <a:solidFill>
-                  <a:srgbClr val="111111"/>
-                </a:solidFill>
-                <a:latin typeface="Calibri" pitchFamily="34" charset="0"/>
-                <a:ea typeface="Calibri" pitchFamily="34" charset="-122"/>
-                <a:cs typeface="Calibri" pitchFamily="34" charset="-120"/>
-              </a:rPr>
-              <a:t>Photo, Activity 1: “Woman uses a computer in an internet cafe” by World Bank Photo Collection, CC BY-NC-ND 2.0, via Flickr (https://www.flickr.com/photos/10816734@N03/7556691396)</a:t>
-            </a:r>
-            <a:endParaRPr lang="en-US" sz="1800" dirty="0"/>
-          </a:p>
-          <a:p>
-            <a:pPr algn="l" marL="342900" indent="-342900">
-              <a:spcAft>
-                <a:spcPts val="800"/>
-              </a:spcAft>
-              <a:buSzPct val="100000"/>
-              <a:buChar char="•"/>
-            </a:pPr>
-            <a:r>
-              <a:rPr lang="en-US" sz="1800" dirty="0">
-                <a:solidFill>
-                  <a:srgbClr val="111111"/>
-                </a:solidFill>
-                <a:latin typeface="Calibri" pitchFamily="34" charset="0"/>
-                <a:ea typeface="Calibri" pitchFamily="34" charset="-122"/>
-                <a:cs typeface="Calibri" pitchFamily="34" charset="-120"/>
-              </a:rPr>
-              <a:t>Photo, Activity 2: “DAPA GPS Fruit 5” by CIAT International Center for Tropical Agriculture, CC BY-SA 2.0, via Flickr (https://www.flickr.com/photos/38476503@N08/4821530518)</a:t>
-            </a:r>
-            <a:endParaRPr lang="en-US" sz="1800" dirty="0"/>
-          </a:p>
-          <a:p>
-            <a:pPr algn="l" marL="342900" indent="-342900">
-              <a:spcAft>
-                <a:spcPts val="800"/>
-              </a:spcAft>
-              <a:buSzPct val="100000"/>
-              <a:buChar char="•"/>
-            </a:pPr>
-            <a:r>
-              <a:rPr lang="en-US" sz="1800" dirty="0">
-                <a:solidFill>
-                  <a:srgbClr val="111111"/>
-                </a:solidFill>
-                <a:latin typeface="Calibri" pitchFamily="34" charset="0"/>
-                <a:ea typeface="Calibri" pitchFamily="34" charset="-122"/>
-                <a:cs typeface="Calibri" pitchFamily="34" charset="-120"/>
-              </a:rPr>
-              <a:t>Photo, Activity 3: “The Oneputa Combined School goes from Grade 1 through to Grade 10” by World Bank Photo Collection, CC BY-NC-ND 2.0, via Flickr (https://www.flickr.com/photos/10816734@N03/5321464442)</a:t>
-            </a:r>
-            <a:endParaRPr lang="en-US" sz="1800" dirty="0"/>
-          </a:p>
-          <a:p>
-            <a:pPr algn="l" marL="342900" indent="-342900">
-              <a:spcAft>
-                <a:spcPts val="800"/>
-              </a:spcAft>
-              <a:buSzPct val="100000"/>
-              <a:buChar char="•"/>
-            </a:pPr>
-            <a:r>
-              <a:rPr lang="en-US" sz="1800" dirty="0">
-                <a:solidFill>
-                  <a:srgbClr val="111111"/>
-                </a:solidFill>
-                <a:latin typeface="Calibri" pitchFamily="34" charset="0"/>
-                <a:ea typeface="Calibri" pitchFamily="34" charset="-122"/>
-                <a:cs typeface="Calibri" pitchFamily="34" charset="-120"/>
-              </a:rPr>
-              <a:t>Photo, Activity 4: “Scenes from Rwanda” by International Monetary Fund, CC BY-NC-ND 2.0, via Flickr (https://www.flickr.com/photos/38851430@N07/52660758172)</a:t>
-            </a:r>
-            <a:endParaRPr lang="en-US" sz="1800" dirty="0"/>
-          </a:p>
-          <a:p>
-            <a:pPr algn="l" marL="342900" indent="-342900">
-              <a:spcAft>
-                <a:spcPts val="800"/>
-              </a:spcAft>
-              <a:buSzPct val="100000"/>
-              <a:buChar char="•"/>
-            </a:pPr>
-            <a:r>
-              <a:rPr lang="en-US" sz="1800" dirty="0">
-                <a:solidFill>
-                  <a:srgbClr val="111111"/>
-                </a:solidFill>
-                <a:latin typeface="Calibri" pitchFamily="34" charset="0"/>
-                <a:ea typeface="Calibri" pitchFamily="34" charset="-122"/>
-                <a:cs typeface="Calibri" pitchFamily="34" charset="-120"/>
-              </a:rPr>
-              <a:t>Photo, Activity 5: “Using mobile technology to give feedback about the crop trials” by Bioversity International, CC BY-NC-ND 2.0, via Flickr (https://www.flickr.com/photos/50383637@N07/15019002626)</a:t>
-            </a:r>
-            <a:endParaRPr lang="en-US" sz="1800" dirty="0"/>
-          </a:p>
-        </p:txBody>
-      </p:sp>
-      <p:sp>
-        <p:nvSpPr>
-          <p:cNvPr id="25" name="Slide Number Placeholder 0"/>
-          <p:cNvSpPr>
-            <a:spLocks noGrp="1"/>
-          </p:cNvSpPr>
-          <p:nvPr>
-            <p:ph type="sldNum" sz="quarter" idx="4294967295"/>
-          </p:nvPr>
-        </p:nvSpPr>
-        <p:spPr>
-          <a:xfrm>
-            <a:off x="27432" y="91440"/>
-            <a:ext cx="585216" cy="475488"/>
-          </a:xfrm>
-          <a:prstGeom prst="rect">
-            <a:avLst/>
-          </a:prstGeom>
-          <a:extLst>
-            <a:ext uri="{C572A759-6A51-4108-AA02-DFA0A04FC94B}">
-              <ma14:wrappingTextBoxFlag xmlns:ma14="http://schemas.microsoft.com/office/mac/drawingml/2011/main" val="0"/>
-            </a:ext>
-          </a:extLst>
-        </p:spPr>
-        <p:txBody>
-          <a:bodyPr/>
-          <a:lstStyle>
-            <a:lvl1pPr>
-              <a:defRPr sz="2000">
-                <a:solidFill>
-                  <a:srgbClr val="FFFFFF"/>
-                </a:solidFill>
-                <a:latin typeface="Calibri"/>
-                <a:ea typeface="Calibri"/>
-                <a:cs typeface="Calibri"/>
-              </a:defRPr>
-            </a:lvl1pPr>
-          </a:lstStyle>
-          <a:p>
-            <a:pPr algn="ctr"/>
-            <a:fld id="{F7021451-1387-4CA6-816F-3879F97B5CBC}" type="slidenum">
-              <a:rPr b="1" lang="en-US"/>
               <a:t>52</a:t>
             </a:fld>
             <a:endParaRPr lang="en-US"/>
@@ -20683,7 +20933,7 @@
                 <a:ea typeface="Calibri" pitchFamily="34" charset="-122"/>
                 <a:cs typeface="Calibri" pitchFamily="34" charset="-120"/>
               </a:rPr>
-              <a:t>REFERENCES</a:t>
+              <a:t>TEACHER'S NOTE</a:t>
             </a:r>
             <a:endParaRPr lang="en-US" sz="1400" dirty="0"/>
           </a:p>
@@ -20748,7 +20998,7 @@
                 <a:ea typeface="Times New Roman" pitchFamily="34" charset="-122"/>
                 <a:cs typeface="Times New Roman" pitchFamily="34" charset="-120"/>
               </a:rPr>
-              <a:t>References (continued)</a:t>
+              <a:t>Teacher's Note</a:t>
             </a:r>
             <a:endParaRPr lang="en-US" sz="3600" dirty="0"/>
           </a:p>
@@ -20783,7 +21033,7 @@
               <a:buChar char="•"/>
             </a:pPr>
             <a:r>
-              <a:rPr lang="en-US" sz="1800" dirty="0">
+              <a:rPr lang="en-US" sz="2000" dirty="0">
                 <a:solidFill>
                   <a:srgbClr val="111111"/>
                 </a:solidFill>
@@ -20791,9 +21041,114 @@
                 <a:ea typeface="Calibri" pitchFamily="34" charset="-122"/>
                 <a:cs typeface="Calibri" pitchFamily="34" charset="-120"/>
               </a:rPr>
-              <a:t>Diagrams and animations: drawn for this lesson (Geography Department).</a:t>
-            </a:r>
-            <a:endParaRPr lang="en-US" sz="1800" dirty="0"/>
+              <a:t>Timing: Homework correction, plan, objectives 8 min | Recall, situation, action 10 min | 5 activities 30 min | Board summary (copying) 30 min | Evaluation, remediation 10 min | Homework, next lesson 5 min | Logbook 7 min</a:t>
+            </a:r>
+            <a:endParaRPr lang="en-US" sz="2000" dirty="0"/>
+          </a:p>
+          <a:p>
+            <a:pPr algn="l" marL="342900" indent="-342900">
+              <a:spcAft>
+                <a:spcPts val="800"/>
+              </a:spcAft>
+              <a:buSzPct val="100000"/>
+              <a:buChar char="•"/>
+            </a:pPr>
+            <a:r>
+              <a:rPr lang="en-US" sz="2000" dirty="0">
+                <a:solidFill>
+                  <a:srgbClr val="111111"/>
+                </a:solidFill>
+                <a:latin typeface="Calibri" pitchFamily="34" charset="0"/>
+                <a:ea typeface="Calibri" pitchFamily="34" charset="-122"/>
+                <a:cs typeface="Calibri" pitchFamily="34" charset="-120"/>
+              </a:rPr>
+              <a:t>Without the projector (Activity 1): list.</a:t>
+            </a:r>
+            <a:endParaRPr lang="en-US" sz="2000" dirty="0"/>
+          </a:p>
+          <a:p>
+            <a:pPr algn="l" marL="342900" indent="-342900">
+              <a:spcAft>
+                <a:spcPts val="800"/>
+              </a:spcAft>
+              <a:buSzPct val="100000"/>
+              <a:buChar char="•"/>
+            </a:pPr>
+            <a:r>
+              <a:rPr lang="en-US" sz="2000" dirty="0">
+                <a:solidFill>
+                  <a:srgbClr val="111111"/>
+                </a:solidFill>
+                <a:latin typeface="Calibri" pitchFamily="34" charset="0"/>
+                <a:ea typeface="Calibri" pitchFamily="34" charset="-122"/>
+                <a:cs typeface="Calibri" pitchFamily="34" charset="-120"/>
+              </a:rPr>
+              <a:t>Without the projector (Activity 2): discuss.</a:t>
+            </a:r>
+            <a:endParaRPr lang="en-US" sz="2000" dirty="0"/>
+          </a:p>
+          <a:p>
+            <a:pPr algn="l" marL="342900" indent="-342900">
+              <a:spcAft>
+                <a:spcPts val="800"/>
+              </a:spcAft>
+              <a:buSzPct val="100000"/>
+              <a:buChar char="•"/>
+            </a:pPr>
+            <a:r>
+              <a:rPr lang="en-US" sz="2000" dirty="0">
+                <a:solidFill>
+                  <a:srgbClr val="111111"/>
+                </a:solidFill>
+                <a:latin typeface="Calibri" pitchFamily="34" charset="0"/>
+                <a:ea typeface="Calibri" pitchFamily="34" charset="-122"/>
+                <a:cs typeface="Calibri" pitchFamily="34" charset="-120"/>
+              </a:rPr>
+              <a:t>Without the projector (Activity 3): list.</a:t>
+            </a:r>
+            <a:endParaRPr lang="en-US" sz="2000" dirty="0"/>
+          </a:p>
+          <a:p>
+            <a:pPr algn="l" marL="342900" indent="-342900">
+              <a:spcAft>
+                <a:spcPts val="800"/>
+              </a:spcAft>
+              <a:buSzPct val="100000"/>
+              <a:buChar char="•"/>
+            </a:pPr>
+            <a:r>
+              <a:rPr lang="en-US" sz="2000" dirty="0">
+                <a:solidFill>
+                  <a:srgbClr val="111111"/>
+                </a:solidFill>
+                <a:latin typeface="Calibri" pitchFamily="34" charset="0"/>
+                <a:ea typeface="Calibri" pitchFamily="34" charset="-122"/>
+                <a:cs typeface="Calibri" pitchFamily="34" charset="-120"/>
+              </a:rPr>
+              <a:t>Without the projector (Activity 4): discuss.</a:t>
+            </a:r>
+            <a:endParaRPr lang="en-US" sz="2000" dirty="0"/>
+          </a:p>
+          <a:p>
+            <a:pPr algn="l" marL="342900" indent="-342900">
+              <a:spcAft>
+                <a:spcPts val="800"/>
+              </a:spcAft>
+              <a:buSzPct val="100000"/>
+              <a:buChar char="•"/>
+            </a:pPr>
+            <a:r>
+              <a:rPr lang="en-US" sz="2000" dirty="0">
+                <a:solidFill>
+                  <a:srgbClr val="111111"/>
+                </a:solidFill>
+                <a:latin typeface="Calibri" pitchFamily="34" charset="0"/>
+                <a:ea typeface="Calibri" pitchFamily="34" charset="-122"/>
+                <a:cs typeface="Calibri" pitchFamily="34" charset="-120"/>
+              </a:rPr>
+              <a:t>Without the projector (Activity 5): discuss.</a:t>
+            </a:r>
+            <a:endParaRPr lang="en-US" sz="2000" dirty="0"/>
           </a:p>
         </p:txBody>
       </p:sp>
@@ -20840,6 +21195,551 @@
             <a:fld id="{F7021451-1387-4CA6-816F-3879F97B5CBC}" type="slidenum">
               <a:rPr b="1" lang="en-US"/>
               <a:t>53</a:t>
+            </a:fld>
+            <a:endParaRPr lang="en-US"/>
+          </a:p>
+        </p:txBody>
+      </p:sp>
+    </p:spTree>
+  </p:cSld>
+  <p:clrMapOvr>
+    <a:masterClrMapping/>
+  </p:clrMapOvr>
+</p:sld>
+</file>
+
+<file path=ppt/slides/slide54.xml><?xml version="1.0" encoding="utf-8"?>
+<p:sld xmlns:a="http://schemas.openxmlformats.org/drawingml/2006/main" xmlns:r="http://schemas.openxmlformats.org/officeDocument/2006/relationships" xmlns:p="http://schemas.openxmlformats.org/presentationml/2006/main">
+  <p:cSld name="Slide 54">
+    <p:spTree>
+      <p:nvGrpSpPr>
+        <p:cNvPr id="1" name=""/>
+        <p:cNvGrpSpPr/>
+        <p:nvPr/>
+      </p:nvGrpSpPr>
+      <p:grpSpPr>
+        <a:xfrm>
+          <a:off x="0" y="0"/>
+          <a:ext cx="0" cy="0"/>
+          <a:chOff x="0" y="0"/>
+          <a:chExt cx="0" cy="0"/>
+        </a:xfrm>
+      </p:grpSpPr>
+      <p:sp>
+        <p:nvSpPr>
+          <p:cNvPr id="2" name="Text 0"/>
+          <p:cNvSpPr/>
+          <p:nvPr/>
+        </p:nvSpPr>
+        <p:spPr>
+          <a:xfrm>
+            <a:off x="457200" y="713232"/>
+            <a:ext cx="11368735" cy="274320"/>
+          </a:xfrm>
+          <a:prstGeom prst="rect">
+            <a:avLst/>
+          </a:prstGeom>
+          <a:noFill/>
+          <a:ln/>
+        </p:spPr>
+        <p:txBody>
+          <a:bodyPr wrap="square" lIns="0" tIns="0" rIns="0" bIns="0" rtlCol="0" anchor="ctr"/>
+          <a:lstStyle/>
+          <a:p>
+            <a:pPr algn="r" indent="0" marL="0">
+              <a:buNone/>
+            </a:pPr>
+            <a:r>
+              <a:rPr lang="en-US" sz="1400" b="1" dirty="0">
+                <a:solidFill>
+                  <a:srgbClr val="1C3F6E"/>
+                </a:solidFill>
+                <a:latin typeface="Calibri" pitchFamily="34" charset="0"/>
+                <a:ea typeface="Calibri" pitchFamily="34" charset="-122"/>
+                <a:cs typeface="Calibri" pitchFamily="34" charset="-120"/>
+              </a:rPr>
+              <a:t>REFERENCES</a:t>
+            </a:r>
+            <a:endParaRPr lang="en-US" sz="1400" dirty="0"/>
+          </a:p>
+        </p:txBody>
+      </p:sp>
+      <p:pic>
+        <p:nvPicPr>
+          <p:cNvPr id="3" name="Image 0" descr="/home/claude/f4/img/minesec_sheet.png">    </p:cNvPr>
+          <p:cNvPicPr>
+            <a:picLocks noChangeAspect="1"/>
+          </p:cNvPicPr>
+          <p:nvPr/>
+        </p:nvPicPr>
+        <p:blipFill>
+          <a:blip r:embed="rId1"/>
+          <a:stretch>
+            <a:fillRect/>
+          </a:stretch>
+        </p:blipFill>
+        <p:spPr>
+          <a:xfrm>
+            <a:off x="0" y="658368"/>
+            <a:ext cx="1463040" cy="5833872"/>
+          </a:xfrm>
+          <a:prstGeom prst="rect">
+            <a:avLst/>
+          </a:prstGeom>
+        </p:spPr>
+      </p:pic>
+      <p:sp>
+        <p:nvSpPr>
+          <p:cNvPr id="4" name="Text 1"/>
+          <p:cNvSpPr/>
+          <p:nvPr/>
+        </p:nvSpPr>
+        <p:spPr>
+          <a:xfrm>
+            <a:off x="1691640" y="1005840"/>
+            <a:ext cx="10180015" cy="731520"/>
+          </a:xfrm>
+          <a:prstGeom prst="rect">
+            <a:avLst/>
+          </a:prstGeom>
+          <a:noFill/>
+          <a:ln/>
+        </p:spPr>
+        <p:txBody>
+          <a:bodyPr wrap="square" lIns="0" tIns="0" rIns="0" bIns="0" rtlCol="0" anchor="ctr">
+            <a:normAutofit/>
+          </a:bodyPr>
+          <a:lstStyle/>
+          <a:p>
+            <a:pPr algn="ctr" indent="0" marL="0">
+              <a:buNone/>
+            </a:pPr>
+            <a:r>
+              <a:rPr lang="en-US" sz="3600" b="1" dirty="0">
+                <a:solidFill>
+                  <a:srgbClr val="990011"/>
+                </a:solidFill>
+                <a:latin typeface="Times New Roman" pitchFamily="34" charset="0"/>
+                <a:ea typeface="Times New Roman" pitchFamily="34" charset="-122"/>
+                <a:cs typeface="Times New Roman" pitchFamily="34" charset="-120"/>
+              </a:rPr>
+              <a:t>References</a:t>
+            </a:r>
+            <a:endParaRPr lang="en-US" sz="3600" dirty="0"/>
+          </a:p>
+        </p:txBody>
+      </p:sp>
+      <p:sp>
+        <p:nvSpPr>
+          <p:cNvPr id="5" name="Text 2"/>
+          <p:cNvSpPr/>
+          <p:nvPr/>
+        </p:nvSpPr>
+        <p:spPr>
+          <a:xfrm>
+            <a:off x="1691640" y="1783080"/>
+            <a:ext cx="10180015" cy="4663440"/>
+          </a:xfrm>
+          <a:prstGeom prst="rect">
+            <a:avLst/>
+          </a:prstGeom>
+          <a:noFill/>
+          <a:ln/>
+        </p:spPr>
+        <p:txBody>
+          <a:bodyPr wrap="square" lIns="0" tIns="0" rIns="0" bIns="0" rtlCol="0" anchor="t"/>
+          <a:lstStyle/>
+          <a:p>
+            <a:pPr algn="l" marL="342900" indent="-342900">
+              <a:spcAft>
+                <a:spcPts val="800"/>
+              </a:spcAft>
+              <a:buSzPct val="100000"/>
+              <a:buChar char="•"/>
+            </a:pPr>
+            <a:r>
+              <a:rPr lang="en-US" sz="1800" dirty="0">
+                <a:solidFill>
+                  <a:srgbClr val="111111"/>
+                </a:solidFill>
+                <a:latin typeface="Calibri" pitchFamily="34" charset="0"/>
+                <a:ea typeface="Calibri" pitchFamily="34" charset="-122"/>
+                <a:cs typeface="Calibri" pitchFamily="34" charset="-120"/>
+              </a:rPr>
+              <a:t>Geography Syllabus, Forms I–V, MINESEC (2023) — Form 5, Module I: Management of Manufacturing and Tertiary Activities.</a:t>
+            </a:r>
+            <a:endParaRPr lang="en-US" sz="1800" dirty="0"/>
+          </a:p>
+          <a:p>
+            <a:pPr algn="l" marL="342900" indent="-342900">
+              <a:spcAft>
+                <a:spcPts val="800"/>
+              </a:spcAft>
+              <a:buSzPct val="100000"/>
+              <a:buChar char="•"/>
+            </a:pPr>
+            <a:r>
+              <a:rPr lang="en-US" sz="1800" dirty="0">
+                <a:solidFill>
+                  <a:srgbClr val="111111"/>
+                </a:solidFill>
+                <a:latin typeface="Calibri" pitchFamily="34" charset="0"/>
+                <a:ea typeface="Calibri" pitchFamily="34" charset="-122"/>
+                <a:cs typeface="Calibri" pitchFamily="34" charset="-120"/>
+              </a:rPr>
+              <a:t>Photo, Activity 1: “Woman uses a computer in an internet cafe” by World Bank Photo Collection, CC BY-NC-ND 2.0, via Flickr (https://www.flickr.com/photos/10816734@N03/7556691396)</a:t>
+            </a:r>
+            <a:endParaRPr lang="en-US" sz="1800" dirty="0"/>
+          </a:p>
+          <a:p>
+            <a:pPr algn="l" marL="342900" indent="-342900">
+              <a:spcAft>
+                <a:spcPts val="800"/>
+              </a:spcAft>
+              <a:buSzPct val="100000"/>
+              <a:buChar char="•"/>
+            </a:pPr>
+            <a:r>
+              <a:rPr lang="en-US" sz="1800" dirty="0">
+                <a:solidFill>
+                  <a:srgbClr val="111111"/>
+                </a:solidFill>
+                <a:latin typeface="Calibri" pitchFamily="34" charset="0"/>
+                <a:ea typeface="Calibri" pitchFamily="34" charset="-122"/>
+                <a:cs typeface="Calibri" pitchFamily="34" charset="-120"/>
+              </a:rPr>
+              <a:t>Photo, Activity 2: “DAPA GPS Fruit 5” by CIAT International Center for Tropical Agriculture, CC BY-SA 2.0, via Flickr (https://www.flickr.com/photos/38476503@N08/4821530518)</a:t>
+            </a:r>
+            <a:endParaRPr lang="en-US" sz="1800" dirty="0"/>
+          </a:p>
+          <a:p>
+            <a:pPr algn="l" marL="342900" indent="-342900">
+              <a:spcAft>
+                <a:spcPts val="800"/>
+              </a:spcAft>
+              <a:buSzPct val="100000"/>
+              <a:buChar char="•"/>
+            </a:pPr>
+            <a:r>
+              <a:rPr lang="en-US" sz="1800" dirty="0">
+                <a:solidFill>
+                  <a:srgbClr val="111111"/>
+                </a:solidFill>
+                <a:latin typeface="Calibri" pitchFamily="34" charset="0"/>
+                <a:ea typeface="Calibri" pitchFamily="34" charset="-122"/>
+                <a:cs typeface="Calibri" pitchFamily="34" charset="-120"/>
+              </a:rPr>
+              <a:t>Photo, Activity 3: “The Oneputa Combined School goes from Grade 1 through to Grade 10” by World Bank Photo Collection, CC BY-NC-ND 2.0, via Flickr (https://www.flickr.com/photos/10816734@N03/5321464442)</a:t>
+            </a:r>
+            <a:endParaRPr lang="en-US" sz="1800" dirty="0"/>
+          </a:p>
+          <a:p>
+            <a:pPr algn="l" marL="342900" indent="-342900">
+              <a:spcAft>
+                <a:spcPts val="800"/>
+              </a:spcAft>
+              <a:buSzPct val="100000"/>
+              <a:buChar char="•"/>
+            </a:pPr>
+            <a:r>
+              <a:rPr lang="en-US" sz="1800" dirty="0">
+                <a:solidFill>
+                  <a:srgbClr val="111111"/>
+                </a:solidFill>
+                <a:latin typeface="Calibri" pitchFamily="34" charset="0"/>
+                <a:ea typeface="Calibri" pitchFamily="34" charset="-122"/>
+                <a:cs typeface="Calibri" pitchFamily="34" charset="-120"/>
+              </a:rPr>
+              <a:t>Photo, Activity 4: “Scenes from Rwanda” by International Monetary Fund, CC BY-NC-ND 2.0, via Flickr (https://www.flickr.com/photos/38851430@N07/52660758172)</a:t>
+            </a:r>
+            <a:endParaRPr lang="en-US" sz="1800" dirty="0"/>
+          </a:p>
+          <a:p>
+            <a:pPr algn="l" marL="342900" indent="-342900">
+              <a:spcAft>
+                <a:spcPts val="800"/>
+              </a:spcAft>
+              <a:buSzPct val="100000"/>
+              <a:buChar char="•"/>
+            </a:pPr>
+            <a:r>
+              <a:rPr lang="en-US" sz="1800" dirty="0">
+                <a:solidFill>
+                  <a:srgbClr val="111111"/>
+                </a:solidFill>
+                <a:latin typeface="Calibri" pitchFamily="34" charset="0"/>
+                <a:ea typeface="Calibri" pitchFamily="34" charset="-122"/>
+                <a:cs typeface="Calibri" pitchFamily="34" charset="-120"/>
+              </a:rPr>
+              <a:t>Photo, Activity 5: “Using mobile technology to give feedback about the crop trials” by Bioversity International, CC BY-NC-ND 2.0, via Flickr (https://www.flickr.com/photos/50383637@N07/15019002626)</a:t>
+            </a:r>
+            <a:endParaRPr lang="en-US" sz="1800" dirty="0"/>
+          </a:p>
+        </p:txBody>
+      </p:sp>
+      <p:sp>
+        <p:nvSpPr>
+          <p:cNvPr id="25" name="Slide Number Placeholder 0"/>
+          <p:cNvSpPr>
+            <a:spLocks noGrp="1"/>
+          </p:cNvSpPr>
+          <p:nvPr>
+            <p:ph type="sldNum" sz="quarter" idx="4294967295"/>
+          </p:nvPr>
+        </p:nvSpPr>
+        <p:spPr>
+          <a:xfrm>
+            <a:off x="27432" y="91440"/>
+            <a:ext cx="585216" cy="475488"/>
+          </a:xfrm>
+          <a:prstGeom prst="rect">
+            <a:avLst/>
+          </a:prstGeom>
+          <a:extLst>
+            <a:ext uri="{C572A759-6A51-4108-AA02-DFA0A04FC94B}">
+              <ma14:wrappingTextBoxFlag xmlns:ma14="http://schemas.microsoft.com/office/mac/drawingml/2011/main" val="0"/>
+            </a:ext>
+          </a:extLst>
+        </p:spPr>
+        <p:txBody>
+          <a:bodyPr/>
+          <a:lstStyle>
+            <a:lvl1pPr>
+              <a:defRPr sz="2000">
+                <a:solidFill>
+                  <a:srgbClr val="FFFFFF"/>
+                </a:solidFill>
+                <a:latin typeface="Calibri"/>
+                <a:ea typeface="Calibri"/>
+                <a:cs typeface="Calibri"/>
+              </a:defRPr>
+            </a:lvl1pPr>
+          </a:lstStyle>
+          <a:p>
+            <a:pPr algn="ctr"/>
+            <a:fld id="{F7021451-1387-4CA6-816F-3879F97B5CBC}" type="slidenum">
+              <a:rPr b="1" lang="en-US"/>
+              <a:t>54</a:t>
+            </a:fld>
+            <a:endParaRPr lang="en-US"/>
+          </a:p>
+        </p:txBody>
+      </p:sp>
+    </p:spTree>
+  </p:cSld>
+  <p:clrMapOvr>
+    <a:masterClrMapping/>
+  </p:clrMapOvr>
+</p:sld>
+</file>
+
+<file path=ppt/slides/slide55.xml><?xml version="1.0" encoding="utf-8"?>
+<p:sld xmlns:a="http://schemas.openxmlformats.org/drawingml/2006/main" xmlns:r="http://schemas.openxmlformats.org/officeDocument/2006/relationships" xmlns:p="http://schemas.openxmlformats.org/presentationml/2006/main">
+  <p:cSld name="Slide 55">
+    <p:spTree>
+      <p:nvGrpSpPr>
+        <p:cNvPr id="1" name=""/>
+        <p:cNvGrpSpPr/>
+        <p:nvPr/>
+      </p:nvGrpSpPr>
+      <p:grpSpPr>
+        <a:xfrm>
+          <a:off x="0" y="0"/>
+          <a:ext cx="0" cy="0"/>
+          <a:chOff x="0" y="0"/>
+          <a:chExt cx="0" cy="0"/>
+        </a:xfrm>
+      </p:grpSpPr>
+      <p:sp>
+        <p:nvSpPr>
+          <p:cNvPr id="2" name="Text 0"/>
+          <p:cNvSpPr/>
+          <p:nvPr/>
+        </p:nvSpPr>
+        <p:spPr>
+          <a:xfrm>
+            <a:off x="457200" y="713232"/>
+            <a:ext cx="11368735" cy="274320"/>
+          </a:xfrm>
+          <a:prstGeom prst="rect">
+            <a:avLst/>
+          </a:prstGeom>
+          <a:noFill/>
+          <a:ln/>
+        </p:spPr>
+        <p:txBody>
+          <a:bodyPr wrap="square" lIns="0" tIns="0" rIns="0" bIns="0" rtlCol="0" anchor="ctr"/>
+          <a:lstStyle/>
+          <a:p>
+            <a:pPr algn="r" indent="0" marL="0">
+              <a:buNone/>
+            </a:pPr>
+            <a:r>
+              <a:rPr lang="en-US" sz="1400" b="1" dirty="0">
+                <a:solidFill>
+                  <a:srgbClr val="1C3F6E"/>
+                </a:solidFill>
+                <a:latin typeface="Calibri" pitchFamily="34" charset="0"/>
+                <a:ea typeface="Calibri" pitchFamily="34" charset="-122"/>
+                <a:cs typeface="Calibri" pitchFamily="34" charset="-120"/>
+              </a:rPr>
+              <a:t>REFERENCES</a:t>
+            </a:r>
+            <a:endParaRPr lang="en-US" sz="1400" dirty="0"/>
+          </a:p>
+        </p:txBody>
+      </p:sp>
+      <p:pic>
+        <p:nvPicPr>
+          <p:cNvPr id="3" name="Image 0" descr="/home/claude/f4/img/minesec_sheet.png">    </p:cNvPr>
+          <p:cNvPicPr>
+            <a:picLocks noChangeAspect="1"/>
+          </p:cNvPicPr>
+          <p:nvPr/>
+        </p:nvPicPr>
+        <p:blipFill>
+          <a:blip r:embed="rId1"/>
+          <a:stretch>
+            <a:fillRect/>
+          </a:stretch>
+        </p:blipFill>
+        <p:spPr>
+          <a:xfrm>
+            <a:off x="0" y="658368"/>
+            <a:ext cx="5120640" cy="5833872"/>
+          </a:xfrm>
+          <a:prstGeom prst="rect">
+            <a:avLst/>
+          </a:prstGeom>
+        </p:spPr>
+      </p:pic>
+      <p:sp>
+        <p:nvSpPr>
+          <p:cNvPr id="4" name="Text 1"/>
+          <p:cNvSpPr/>
+          <p:nvPr/>
+        </p:nvSpPr>
+        <p:spPr>
+          <a:xfrm>
+            <a:off x="5349240" y="1005840"/>
+            <a:ext cx="6522415" cy="731520"/>
+          </a:xfrm>
+          <a:prstGeom prst="rect">
+            <a:avLst/>
+          </a:prstGeom>
+          <a:noFill/>
+          <a:ln/>
+        </p:spPr>
+        <p:txBody>
+          <a:bodyPr wrap="square" lIns="0" tIns="0" rIns="0" bIns="0" rtlCol="0" anchor="ctr">
+            <a:normAutofit/>
+          </a:bodyPr>
+          <a:lstStyle/>
+          <a:p>
+            <a:pPr algn="ctr" indent="0" marL="0">
+              <a:buNone/>
+            </a:pPr>
+            <a:r>
+              <a:rPr lang="en-US" sz="3600" b="1" dirty="0">
+                <a:solidFill>
+                  <a:srgbClr val="990011"/>
+                </a:solidFill>
+                <a:latin typeface="Times New Roman" pitchFamily="34" charset="0"/>
+                <a:ea typeface="Times New Roman" pitchFamily="34" charset="-122"/>
+                <a:cs typeface="Times New Roman" pitchFamily="34" charset="-120"/>
+              </a:rPr>
+              <a:t>References (continued)</a:t>
+            </a:r>
+            <a:endParaRPr lang="en-US" sz="3600" dirty="0"/>
+          </a:p>
+        </p:txBody>
+      </p:sp>
+      <p:sp>
+        <p:nvSpPr>
+          <p:cNvPr id="5" name="Text 2"/>
+          <p:cNvSpPr/>
+          <p:nvPr/>
+        </p:nvSpPr>
+        <p:spPr>
+          <a:xfrm>
+            <a:off x="5349240" y="1783080"/>
+            <a:ext cx="6522415" cy="4663440"/>
+          </a:xfrm>
+          <a:prstGeom prst="rect">
+            <a:avLst/>
+          </a:prstGeom>
+          <a:noFill/>
+          <a:ln/>
+        </p:spPr>
+        <p:txBody>
+          <a:bodyPr wrap="square" lIns="0" tIns="0" rIns="0" bIns="0" rtlCol="0" anchor="t"/>
+          <a:lstStyle/>
+          <a:p>
+            <a:pPr algn="l" marL="342900" indent="-342900">
+              <a:spcAft>
+                <a:spcPts val="800"/>
+              </a:spcAft>
+              <a:buSzPct val="100000"/>
+              <a:buChar char="•"/>
+            </a:pPr>
+            <a:r>
+              <a:rPr lang="en-US" sz="1800" dirty="0">
+                <a:solidFill>
+                  <a:srgbClr val="111111"/>
+                </a:solidFill>
+                <a:latin typeface="Calibri" pitchFamily="34" charset="0"/>
+                <a:ea typeface="Calibri" pitchFamily="34" charset="-122"/>
+                <a:cs typeface="Calibri" pitchFamily="34" charset="-120"/>
+              </a:rPr>
+              <a:t>Diagrams and animations: drawn for this lesson (Geography Department).</a:t>
+            </a:r>
+            <a:endParaRPr lang="en-US" sz="1800" dirty="0"/>
+          </a:p>
+        </p:txBody>
+      </p:sp>
+      <p:sp>
+        <p:nvSpPr>
+          <p:cNvPr id="25" name="Slide Number Placeholder 0"/>
+          <p:cNvSpPr>
+            <a:spLocks noGrp="1"/>
+          </p:cNvSpPr>
+          <p:nvPr>
+            <p:ph type="sldNum" sz="quarter" idx="4294967295"/>
+          </p:nvPr>
+        </p:nvSpPr>
+        <p:spPr>
+          <a:xfrm>
+            <a:off x="27432" y="91440"/>
+            <a:ext cx="585216" cy="475488"/>
+          </a:xfrm>
+          <a:prstGeom prst="rect">
+            <a:avLst/>
+          </a:prstGeom>
+          <a:extLst>
+            <a:ext uri="{C572A759-6A51-4108-AA02-DFA0A04FC94B}">
+              <ma14:wrappingTextBoxFlag xmlns:ma14="http://schemas.microsoft.com/office/mac/drawingml/2011/main" val="0"/>
+            </a:ext>
+          </a:extLst>
+        </p:spPr>
+        <p:txBody>
+          <a:bodyPr/>
+          <a:lstStyle>
+            <a:lvl1pPr>
+              <a:defRPr sz="2000">
+                <a:solidFill>
+                  <a:srgbClr val="FFFFFF"/>
+                </a:solidFill>
+                <a:latin typeface="Calibri"/>
+                <a:ea typeface="Calibri"/>
+                <a:cs typeface="Calibri"/>
+              </a:defRPr>
+            </a:lvl1pPr>
+          </a:lstStyle>
+          <a:p>
+            <a:pPr algn="ctr"/>
+            <a:fld id="{F7021451-1387-4CA6-816F-3879F97B5CBC}" type="slidenum">
+              <a:rPr b="1" lang="en-US"/>
+              <a:t>55</a:t>
             </a:fld>
             <a:endParaRPr lang="en-US"/>
           </a:p>
